--- a/curso/pptx/S43.pptx
+++ b/curso/pptx/S43.pptx
@@ -3889,8 +3889,8 @@
         </p:nvSpPr>
         <p:spPr>
           <a:xfrm>
-            <a:off x="640000" y="420000"/>
-            <a:ext cx="10912000" cy="420000"/>
+            <a:off x="10652000" y="380000"/>
+            <a:ext cx="900000" cy="800000"/>
           </a:xfrm>
           <a:prstGeom prst="rect">
             <a:avLst/>
@@ -3905,17 +3905,17 @@
           <a:p>
             <a:pPr>
               <a:spcAft>
-                <a:spcPts val="810"/>
+                <a:spcPts val="1980"/>
               </a:spcAft>
             </a:pPr>
             <a:r>
-              <a:rPr sz="1800" b="1">
+              <a:rPr sz="4400" b="0">
                 <a:solidFill>
                   <a:srgbClr val="1F2A44"/>
                 </a:solidFill>
                 <a:latin typeface="Nunito Sans"/>
               </a:rPr>
-              <a:t>🦉 Aula de Filosofía</a:t>
+              <a:t>🙃</a:t>
             </a:r>
           </a:p>
         </p:txBody>

--- a/curso/pptx/S43.pptx
+++ b/curso/pptx/S43.pptx
@@ -21,6 +21,7 @@
     <p:sldId id="269" r:id="rId21"/>
     <p:sldId id="270" r:id="rId22"/>
     <p:sldId id="271" r:id="rId23"/>
+    <p:sldId id="272" r:id="rId24"/>
   </p:sldIdLst>
   <p:sldSz cx="12192000" cy="6858000" type="screen4x3"/>
   <p:notesSz cx="6858000" cy="9144000"/>
@@ -4051,7 +4052,7 @@
     <p:bg>
       <p:bgPr>
         <a:solidFill>
-          <a:srgbClr val="FBF7EF"/>
+          <a:srgbClr val="1F2A44"/>
         </a:solidFill>
         <a:effectLst/>
       </p:bgPr>
@@ -4071,8 +4072,8 @@
         </p:nvSpPr>
         <p:spPr>
           <a:xfrm>
-            <a:off x="640000" y="380000"/>
-            <a:ext cx="10912000" cy="420000"/>
+            <a:off x="640000" y="2300000"/>
+            <a:ext cx="10912000" cy="500000"/>
           </a:xfrm>
           <a:prstGeom prst="rect">
             <a:avLst/>
@@ -4087,17 +4088,17 @@
           <a:p>
             <a:pPr>
               <a:spcAft>
-                <a:spcPts val="630"/>
+                <a:spcPts val="810"/>
               </a:spcAft>
             </a:pPr>
             <a:r>
-              <a:rPr sz="1400" b="1">
-                <a:solidFill>
-                  <a:srgbClr val="E8793A"/>
-                </a:solidFill>
-                <a:latin typeface="Nunito Sans"/>
-              </a:rPr>
-              <a:t>BLOQUE 2 · CASOS RESUELTOS</a:t>
+              <a:rPr sz="1800" b="1">
+                <a:solidFill>
+                  <a:srgbClr val="F4B183"/>
+                </a:solidFill>
+                <a:latin typeface="Nunito Sans"/>
+              </a:rPr>
+              <a:t>BLOQUE 2</a:t>
             </a:r>
           </a:p>
         </p:txBody>
@@ -4110,7 +4111,7 @@
         </p:nvSpPr>
         <p:spPr>
           <a:xfrm>
-            <a:off x="640000" y="760000"/>
+            <a:off x="640000" y="2800000"/>
             <a:ext cx="10912000" cy="800000"/>
           </a:xfrm>
           <a:prstGeom prst="rect">
@@ -4126,222 +4127,17 @@
           <a:p>
             <a:pPr>
               <a:spcAft>
-                <a:spcPts val="1710"/>
+                <a:spcPts val="2160"/>
               </a:spcAft>
             </a:pPr>
             <a:r>
-              <a:rPr sz="3800" b="1">
-                <a:solidFill>
-                  <a:srgbClr val="1F2A44"/>
+              <a:rPr sz="4800" b="1">
+                <a:solidFill>
+                  <a:srgbClr val="FBF7EF"/>
                 </a:solidFill>
                 <a:latin typeface="Fredoka"/>
               </a:rPr>
-              <a:t>Caso 1 · El bate y la pelota</a:t>
-            </a:r>
-          </a:p>
-        </p:txBody>
-      </p:sp>
-      <p:sp>
-        <p:nvSpPr>
-          <p:cNvPr id="4" name="Rectangle 3"/>
-          <p:cNvSpPr/>
-          <p:nvPr/>
-        </p:nvSpPr>
-        <p:spPr>
-          <a:xfrm>
-            <a:off x="640000" y="1600000"/>
-            <a:ext cx="10912000" cy="1100000"/>
-          </a:xfrm>
-          <a:prstGeom prst="rect">
-            <a:avLst/>
-          </a:prstGeom>
-          <a:solidFill>
-            <a:srgbClr val="FFFFFF"/>
-          </a:solidFill>
-          <a:ln>
-            <a:noFill/>
-          </a:ln>
-        </p:spPr>
-        <p:style>
-          <a:lnRef idx="1">
-            <a:schemeClr val="accent1"/>
-          </a:lnRef>
-          <a:fillRef idx="3">
-            <a:schemeClr val="accent1"/>
-          </a:fillRef>
-          <a:effectRef idx="2">
-            <a:schemeClr val="accent1"/>
-          </a:effectRef>
-          <a:fontRef idx="minor">
-            <a:schemeClr val="lt1"/>
-          </a:fontRef>
-        </p:style>
-        <p:txBody>
-          <a:bodyPr rtlCol="0" anchor="ctr"/>
-          <a:lstStyle/>
-          <a:p>
-            <a:pPr algn="ctr"/>
-          </a:p>
-        </p:txBody>
-      </p:sp>
-      <p:sp>
-        <p:nvSpPr>
-          <p:cNvPr id="5" name="TextBox 4"/>
-          <p:cNvSpPr txBox="1"/>
-          <p:nvPr/>
-        </p:nvSpPr>
-        <p:spPr>
-          <a:xfrm>
-            <a:off x="840000" y="1650000"/>
-            <a:ext cx="10512000" cy="1000000"/>
-          </a:xfrm>
-          <a:prstGeom prst="rect">
-            <a:avLst/>
-          </a:prstGeom>
-          <a:noFill/>
-        </p:spPr>
-        <p:txBody>
-          <a:bodyPr wrap="square" anchor="ctr">
-            <a:spAutoFit/>
-          </a:bodyPr>
-          <a:lstStyle/>
-          <a:p>
-            <a:pPr>
-              <a:spcAft>
-                <a:spcPts val="1170"/>
-              </a:spcAft>
-            </a:pPr>
-            <a:r>
-              <a:rPr sz="2600" b="1">
-                <a:solidFill>
-                  <a:srgbClr val="1F2A44"/>
-                </a:solidFill>
-                <a:latin typeface="Nunito Sans"/>
-              </a:rPr>
-              <a:t>Un bate y una pelota cuestan 1,10 € en total. El bate cuesta 1 € más que la pelota. ¿Cuánto cuesta la pelota?</a:t>
-            </a:r>
-          </a:p>
-        </p:txBody>
-      </p:sp>
-      <p:sp>
-        <p:nvSpPr>
-          <p:cNvPr id="6" name="TextBox 5"/>
-          <p:cNvSpPr txBox="1"/>
-          <p:nvPr/>
-        </p:nvSpPr>
-        <p:spPr>
-          <a:xfrm>
-            <a:off x="640000" y="2900000"/>
-            <a:ext cx="10912000" cy="3500000"/>
-          </a:xfrm>
-          <a:prstGeom prst="rect">
-            <a:avLst/>
-          </a:prstGeom>
-          <a:noFill/>
-        </p:spPr>
-        <p:txBody>
-          <a:bodyPr wrap="square">
-            <a:spAutoFit/>
-          </a:bodyPr>
-          <a:lstStyle/>
-          <a:p>
-            <a:pPr>
-              <a:spcAft>
-                <a:spcPts val="1080"/>
-              </a:spcAft>
-            </a:pPr>
-            <a:r>
-              <a:rPr sz="2400" b="1">
-                <a:solidFill>
-                  <a:srgbClr val="E8793A"/>
-                </a:solidFill>
-                <a:latin typeface="Nunito Sans"/>
-              </a:rPr>
-              <a:t>1. </a:t>
-            </a:r>
-            <a:r>
-              <a:rPr sz="2400" b="0">
-                <a:solidFill>
-                  <a:srgbClr val="1F2A44"/>
-                </a:solidFill>
-                <a:latin typeface="Nunito Sans"/>
-              </a:rPr>
-              <a:t>La respuesta rápida es 10 céntimos. Mucha gente la da, también estudiantes universitarios.</a:t>
-            </a:r>
-          </a:p>
-          <a:p>
-            <a:pPr>
-              <a:spcAft>
-                <a:spcPts val="1080"/>
-              </a:spcAft>
-            </a:pPr>
-            <a:r>
-              <a:rPr sz="2400" b="1">
-                <a:solidFill>
-                  <a:srgbClr val="E8793A"/>
-                </a:solidFill>
-                <a:latin typeface="Nunito Sans"/>
-              </a:rPr>
-              <a:t>2. </a:t>
-            </a:r>
-            <a:r>
-              <a:rPr sz="2400" b="0">
-                <a:solidFill>
-                  <a:srgbClr val="1F2A44"/>
-                </a:solidFill>
-                <a:latin typeface="Nunito Sans"/>
-              </a:rPr>
-              <a:t>Compruebo despacio: si la pelota vale 0,10 €, el bate vale 1,10 €. Total: 1,20 €. ¡Falla!</a:t>
-            </a:r>
-          </a:p>
-          <a:p>
-            <a:pPr>
-              <a:spcAft>
-                <a:spcPts val="1080"/>
-              </a:spcAft>
-            </a:pPr>
-            <a:r>
-              <a:rPr sz="2400" b="1">
-                <a:solidFill>
-                  <a:srgbClr val="E8793A"/>
-                </a:solidFill>
-                <a:latin typeface="Nunito Sans"/>
-              </a:rPr>
-              <a:t>3. </a:t>
-            </a:r>
-            <a:r>
-              <a:rPr sz="2400" b="0">
-                <a:solidFill>
-                  <a:srgbClr val="1F2A44"/>
-                </a:solidFill>
-                <a:latin typeface="Nunito Sans"/>
-              </a:rPr>
-              <a:t>Si la pelota vale 0,05 €, el bate vale 1,05 €. Total: 1,10 €. Correcto.</a:t>
-            </a:r>
-          </a:p>
-          <a:p>
-            <a:pPr>
-              <a:spcAft>
-                <a:spcPts val="1080"/>
-              </a:spcAft>
-            </a:pPr>
-            <a:r>
-              <a:rPr sz="2400" b="1">
-                <a:solidFill>
-                  <a:srgbClr val="E8793A"/>
-                </a:solidFill>
-                <a:latin typeface="Nunito Sans"/>
-              </a:rPr>
-              <a:t>4. </a:t>
-            </a:r>
-            <a:r>
-              <a:rPr sz="2400" b="0">
-                <a:solidFill>
-                  <a:srgbClr val="1F2A44"/>
-                </a:solidFill>
-                <a:latin typeface="Nunito Sans"/>
-              </a:rPr>
-              <a:t>Conclusión: el atajo da una respuesta que «suena» bien. Pensar despacio la corrige.</a:t>
+              <a:t>Casos resueltos</a:t>
             </a:r>
           </a:p>
         </p:txBody>
@@ -4445,7 +4241,7 @@
                 </a:solidFill>
                 <a:latin typeface="Fredoka"/>
               </a:rPr>
-              <a:t>Caso 2 · ¿Qué es más peligroso?</a:t>
+              <a:t>Caso 1 · El bate y la pelota</a:t>
             </a:r>
           </a:p>
         </p:txBody>
@@ -4527,7 +4323,7 @@
                 </a:solidFill>
                 <a:latin typeface="Nunito Sans"/>
               </a:rPr>
-              <a:t>Chen tiene miedo a los tiburones cuando se baña en el mar. En cambio, cruza la calle mirando el móvil sin preocuparse.</a:t>
+              <a:t>Un bate y una pelota cuestan 1,10 € en total. El bate cuesta 1 € más que la pelota. ¿Cuánto cuesta la pelota?</a:t>
             </a:r>
           </a:p>
         </p:txBody>
@@ -4575,7 +4371,7 @@
                 </a:solidFill>
                 <a:latin typeface="Nunito Sans"/>
               </a:rPr>
-              <a:t>Los ataques de tiburón salen mucho en películas y noticias: los recordamos fácil.</a:t>
+              <a:t>La respuesta rápida es 10 céntimos. Mucha gente la da, también estudiantes universitarios.</a:t>
             </a:r>
           </a:p>
           <a:p>
@@ -4600,7 +4396,7 @@
                 </a:solidFill>
                 <a:latin typeface="Nunito Sans"/>
               </a:rPr>
-              <a:t>Los atropellos son muchísimo más frecuentes, pero casi no llaman la atención.</a:t>
+              <a:t>Compruebo despacio: si la pelota vale 0,10 €, el bate vale 1,10 €. Total: 1,20 €. ¡Falla!</a:t>
             </a:r>
           </a:p>
           <a:p>
@@ -4625,7 +4421,7 @@
                 </a:solidFill>
                 <a:latin typeface="Nunito Sans"/>
               </a:rPr>
-              <a:t>Atajo: «si lo recuerdo fácil, pasa mucho». Aquí falla.</a:t>
+              <a:t>Si la pelota vale 0,05 €, el bate vale 1,05 €. Total: 1,10 €. Correcto.</a:t>
             </a:r>
           </a:p>
           <a:p>
@@ -4650,7 +4446,7 @@
                 </a:solidFill>
                 <a:latin typeface="Nunito Sans"/>
               </a:rPr>
-              <a:t>Conclusión: la mente juzga el peligro por lo que recuerda, no por los datos.</a:t>
+              <a:t>Conclusión: el atajo da una respuesta que «suena» bien. Pensar despacio la corrige.</a:t>
             </a:r>
           </a:p>
         </p:txBody>
@@ -4664,6 +4460,333 @@
 </file>
 
 <file path=ppt/slides/slide12.xml><?xml version="1.0" encoding="utf-8"?>
+<p:sld xmlns:a="http://schemas.openxmlformats.org/drawingml/2006/main" xmlns:p="http://schemas.openxmlformats.org/presentationml/2006/main" xmlns:r="http://schemas.openxmlformats.org/officeDocument/2006/relationships">
+  <p:cSld>
+    <p:bg>
+      <p:bgPr>
+        <a:solidFill>
+          <a:srgbClr val="FBF7EF"/>
+        </a:solidFill>
+        <a:effectLst/>
+      </p:bgPr>
+    </p:bg>
+    <p:spTree>
+      <p:nvGrpSpPr>
+        <p:cNvPr id="1" name=""/>
+        <p:cNvGrpSpPr/>
+        <p:nvPr/>
+      </p:nvGrpSpPr>
+      <p:grpSpPr/>
+      <p:sp>
+        <p:nvSpPr>
+          <p:cNvPr id="2" name="TextBox 1"/>
+          <p:cNvSpPr txBox="1"/>
+          <p:nvPr/>
+        </p:nvSpPr>
+        <p:spPr>
+          <a:xfrm>
+            <a:off x="640000" y="380000"/>
+            <a:ext cx="10912000" cy="420000"/>
+          </a:xfrm>
+          <a:prstGeom prst="rect">
+            <a:avLst/>
+          </a:prstGeom>
+          <a:noFill/>
+        </p:spPr>
+        <p:txBody>
+          <a:bodyPr wrap="square">
+            <a:spAutoFit/>
+          </a:bodyPr>
+          <a:lstStyle/>
+          <a:p>
+            <a:pPr>
+              <a:spcAft>
+                <a:spcPts val="630"/>
+              </a:spcAft>
+            </a:pPr>
+            <a:r>
+              <a:rPr sz="1400" b="1">
+                <a:solidFill>
+                  <a:srgbClr val="E8793A"/>
+                </a:solidFill>
+                <a:latin typeface="Nunito Sans"/>
+              </a:rPr>
+              <a:t>BLOQUE 2 · CASOS RESUELTOS</a:t>
+            </a:r>
+          </a:p>
+        </p:txBody>
+      </p:sp>
+      <p:sp>
+        <p:nvSpPr>
+          <p:cNvPr id="3" name="TextBox 2"/>
+          <p:cNvSpPr txBox="1"/>
+          <p:nvPr/>
+        </p:nvSpPr>
+        <p:spPr>
+          <a:xfrm>
+            <a:off x="640000" y="760000"/>
+            <a:ext cx="10912000" cy="800000"/>
+          </a:xfrm>
+          <a:prstGeom prst="rect">
+            <a:avLst/>
+          </a:prstGeom>
+          <a:noFill/>
+        </p:spPr>
+        <p:txBody>
+          <a:bodyPr wrap="square">
+            <a:spAutoFit/>
+          </a:bodyPr>
+          <a:lstStyle/>
+          <a:p>
+            <a:pPr>
+              <a:spcAft>
+                <a:spcPts val="1710"/>
+              </a:spcAft>
+            </a:pPr>
+            <a:r>
+              <a:rPr sz="3800" b="1">
+                <a:solidFill>
+                  <a:srgbClr val="1F2A44"/>
+                </a:solidFill>
+                <a:latin typeface="Fredoka"/>
+              </a:rPr>
+              <a:t>Caso 2 · ¿Qué es más peligroso?</a:t>
+            </a:r>
+          </a:p>
+        </p:txBody>
+      </p:sp>
+      <p:sp>
+        <p:nvSpPr>
+          <p:cNvPr id="4" name="Rectangle 3"/>
+          <p:cNvSpPr/>
+          <p:nvPr/>
+        </p:nvSpPr>
+        <p:spPr>
+          <a:xfrm>
+            <a:off x="640000" y="1600000"/>
+            <a:ext cx="10912000" cy="1100000"/>
+          </a:xfrm>
+          <a:prstGeom prst="rect">
+            <a:avLst/>
+          </a:prstGeom>
+          <a:solidFill>
+            <a:srgbClr val="FFFFFF"/>
+          </a:solidFill>
+          <a:ln>
+            <a:noFill/>
+          </a:ln>
+        </p:spPr>
+        <p:style>
+          <a:lnRef idx="1">
+            <a:schemeClr val="accent1"/>
+          </a:lnRef>
+          <a:fillRef idx="3">
+            <a:schemeClr val="accent1"/>
+          </a:fillRef>
+          <a:effectRef idx="2">
+            <a:schemeClr val="accent1"/>
+          </a:effectRef>
+          <a:fontRef idx="minor">
+            <a:schemeClr val="lt1"/>
+          </a:fontRef>
+        </p:style>
+        <p:txBody>
+          <a:bodyPr rtlCol="0" anchor="ctr"/>
+          <a:lstStyle/>
+          <a:p>
+            <a:pPr algn="ctr"/>
+          </a:p>
+        </p:txBody>
+      </p:sp>
+      <p:sp>
+        <p:nvSpPr>
+          <p:cNvPr id="5" name="TextBox 4"/>
+          <p:cNvSpPr txBox="1"/>
+          <p:nvPr/>
+        </p:nvSpPr>
+        <p:spPr>
+          <a:xfrm>
+            <a:off x="840000" y="1650000"/>
+            <a:ext cx="10512000" cy="1000000"/>
+          </a:xfrm>
+          <a:prstGeom prst="rect">
+            <a:avLst/>
+          </a:prstGeom>
+          <a:noFill/>
+        </p:spPr>
+        <p:txBody>
+          <a:bodyPr wrap="square" anchor="ctr">
+            <a:spAutoFit/>
+          </a:bodyPr>
+          <a:lstStyle/>
+          <a:p>
+            <a:pPr>
+              <a:spcAft>
+                <a:spcPts val="1170"/>
+              </a:spcAft>
+            </a:pPr>
+            <a:r>
+              <a:rPr sz="2600" b="1">
+                <a:solidFill>
+                  <a:srgbClr val="1F2A44"/>
+                </a:solidFill>
+                <a:latin typeface="Nunito Sans"/>
+              </a:rPr>
+              <a:t>Chen tiene miedo a los tiburones cuando se baña en el mar. En cambio, cruza la calle mirando el móvil sin preocuparse.</a:t>
+            </a:r>
+          </a:p>
+        </p:txBody>
+      </p:sp>
+      <p:sp>
+        <p:nvSpPr>
+          <p:cNvPr id="6" name="TextBox 5"/>
+          <p:cNvSpPr txBox="1"/>
+          <p:nvPr/>
+        </p:nvSpPr>
+        <p:spPr>
+          <a:xfrm>
+            <a:off x="640000" y="2900000"/>
+            <a:ext cx="10912000" cy="3500000"/>
+          </a:xfrm>
+          <a:prstGeom prst="rect">
+            <a:avLst/>
+          </a:prstGeom>
+          <a:noFill/>
+        </p:spPr>
+        <p:txBody>
+          <a:bodyPr wrap="square">
+            <a:spAutoFit/>
+          </a:bodyPr>
+          <a:lstStyle/>
+          <a:p>
+            <a:pPr>
+              <a:spcAft>
+                <a:spcPts val="1080"/>
+              </a:spcAft>
+            </a:pPr>
+            <a:r>
+              <a:rPr sz="2400" b="1">
+                <a:solidFill>
+                  <a:srgbClr val="E8793A"/>
+                </a:solidFill>
+                <a:latin typeface="Nunito Sans"/>
+              </a:rPr>
+              <a:t>1. </a:t>
+            </a:r>
+            <a:r>
+              <a:rPr sz="2400" b="0">
+                <a:solidFill>
+                  <a:srgbClr val="1F2A44"/>
+                </a:solidFill>
+                <a:latin typeface="Nunito Sans"/>
+              </a:rPr>
+              <a:t>Los ataques de tiburón salen mucho en películas y noticias: los recordamos fácil.</a:t>
+            </a:r>
+          </a:p>
+          <a:p>
+            <a:pPr>
+              <a:spcAft>
+                <a:spcPts val="1080"/>
+              </a:spcAft>
+            </a:pPr>
+            <a:r>
+              <a:rPr sz="2400" b="1">
+                <a:solidFill>
+                  <a:srgbClr val="E8793A"/>
+                </a:solidFill>
+                <a:latin typeface="Nunito Sans"/>
+              </a:rPr>
+              <a:t>2. </a:t>
+            </a:r>
+            <a:r>
+              <a:rPr sz="2400" b="0">
+                <a:solidFill>
+                  <a:srgbClr val="1F2A44"/>
+                </a:solidFill>
+                <a:latin typeface="Nunito Sans"/>
+              </a:rPr>
+              <a:t>Los atropellos son muchísimo más frecuentes, pero casi no llaman la atención.</a:t>
+            </a:r>
+          </a:p>
+          <a:p>
+            <a:pPr>
+              <a:spcAft>
+                <a:spcPts val="1080"/>
+              </a:spcAft>
+            </a:pPr>
+            <a:r>
+              <a:rPr sz="2400" b="1">
+                <a:solidFill>
+                  <a:srgbClr val="E8793A"/>
+                </a:solidFill>
+                <a:latin typeface="Nunito Sans"/>
+              </a:rPr>
+              <a:t>3. </a:t>
+            </a:r>
+            <a:r>
+              <a:rPr sz="2400" b="0">
+                <a:solidFill>
+                  <a:srgbClr val="1F2A44"/>
+                </a:solidFill>
+                <a:latin typeface="Nunito Sans"/>
+              </a:rPr>
+              <a:t>Atajo: «si lo recuerdo fácil, pasa mucho». Aquí falla.</a:t>
+            </a:r>
+          </a:p>
+          <a:p>
+            <a:pPr>
+              <a:spcAft>
+                <a:spcPts val="1080"/>
+              </a:spcAft>
+            </a:pPr>
+            <a:r>
+              <a:rPr sz="2400" b="1">
+                <a:solidFill>
+                  <a:srgbClr val="E8793A"/>
+                </a:solidFill>
+                <a:latin typeface="Nunito Sans"/>
+              </a:rPr>
+              <a:t>4. </a:t>
+            </a:r>
+            <a:r>
+              <a:rPr sz="2400" b="0">
+                <a:solidFill>
+                  <a:srgbClr val="1F2A44"/>
+                </a:solidFill>
+                <a:latin typeface="Nunito Sans"/>
+              </a:rPr>
+              <a:t>Conclusión: </a:t>
+            </a:r>
+            <a:r>
+              <a:rPr sz="2400" b="1">
+                <a:solidFill>
+                  <a:srgbClr val="1F2A44"/>
+                </a:solidFill>
+                <a:latin typeface="Nunito Sans"/>
+              </a:rPr>
+              <a:t>sesgo de disponibilidad</a:t>
+            </a:r>
+            <a:r>
+              <a:rPr sz="2400" b="0">
+                <a:solidFill>
+                  <a:srgbClr val="1F2A44"/>
+                </a:solidFill>
+                <a:latin typeface="Nunito Sans"/>
+              </a:rPr>
+              <a:t>. La mente juzga el peligro por lo que recuerda fácil, no por los datos.</a:t>
+            </a:r>
+          </a:p>
+        </p:txBody>
+      </p:sp>
+    </p:spTree>
+  </p:cSld>
+  <p:clrMapOvr>
+    <a:masterClrMapping/>
+  </p:clrMapOvr>
+</p:sld>
+</file>
+
+<file path=ppt/slides/slide13.xml><?xml version="1.0" encoding="utf-8"?>
 <p:sld xmlns:a="http://schemas.openxmlformats.org/drawingml/2006/main" xmlns:p="http://schemas.openxmlformats.org/presentationml/2006/main" xmlns:r="http://schemas.openxmlformats.org/officeDocument/2006/relationships">
   <p:cSld>
     <p:bg>
@@ -4985,149 +5108,6 @@
                 <a:latin typeface="Nunito Sans"/>
               </a:rPr>
               <a:t>Conclusión: decidir rápido no es un error. Los atajos son útiles; el problema es cuando fallan de forma predecible.</a:t>
-            </a:r>
-          </a:p>
-        </p:txBody>
-      </p:sp>
-    </p:spTree>
-  </p:cSld>
-  <p:clrMapOvr>
-    <a:masterClrMapping/>
-  </p:clrMapOvr>
-</p:sld>
-</file>
-
-<file path=ppt/slides/slide13.xml><?xml version="1.0" encoding="utf-8"?>
-<p:sld xmlns:a="http://schemas.openxmlformats.org/drawingml/2006/main" xmlns:p="http://schemas.openxmlformats.org/presentationml/2006/main" xmlns:r="http://schemas.openxmlformats.org/officeDocument/2006/relationships">
-  <p:cSld>
-    <p:bg>
-      <p:bgPr>
-        <a:solidFill>
-          <a:srgbClr val="FBF7EF"/>
-        </a:solidFill>
-        <a:effectLst/>
-      </p:bgPr>
-    </p:bg>
-    <p:spTree>
-      <p:nvGrpSpPr>
-        <p:cNvPr id="1" name=""/>
-        <p:cNvGrpSpPr/>
-        <p:nvPr/>
-      </p:nvGrpSpPr>
-      <p:grpSpPr/>
-      <p:sp>
-        <p:nvSpPr>
-          <p:cNvPr id="2" name="TextBox 1"/>
-          <p:cNvSpPr txBox="1"/>
-          <p:nvPr/>
-        </p:nvSpPr>
-        <p:spPr>
-          <a:xfrm>
-            <a:off x="640000" y="380000"/>
-            <a:ext cx="10912000" cy="420000"/>
-          </a:xfrm>
-          <a:prstGeom prst="rect">
-            <a:avLst/>
-          </a:prstGeom>
-          <a:noFill/>
-        </p:spPr>
-        <p:txBody>
-          <a:bodyPr wrap="square">
-            <a:spAutoFit/>
-          </a:bodyPr>
-          <a:lstStyle/>
-          <a:p>
-            <a:pPr>
-              <a:spcAft>
-                <a:spcPts val="630"/>
-              </a:spcAft>
-            </a:pPr>
-            <a:r>
-              <a:rPr sz="1400" b="1">
-                <a:solidFill>
-                  <a:srgbClr val="E8793A"/>
-                </a:solidFill>
-                <a:latin typeface="Nunito Sans"/>
-              </a:rPr>
-              <a:t>LO DE HOY EN TRES LÍNEAS</a:t>
-            </a:r>
-          </a:p>
-        </p:txBody>
-      </p:sp>
-      <p:sp>
-        <p:nvSpPr>
-          <p:cNvPr id="3" name="TextBox 2"/>
-          <p:cNvSpPr txBox="1"/>
-          <p:nvPr/>
-        </p:nvSpPr>
-        <p:spPr>
-          <a:xfrm>
-            <a:off x="640000" y="760000"/>
-            <a:ext cx="10912000" cy="800000"/>
-          </a:xfrm>
-          <a:prstGeom prst="rect">
-            <a:avLst/>
-          </a:prstGeom>
-          <a:noFill/>
-        </p:spPr>
-        <p:txBody>
-          <a:bodyPr wrap="square">
-            <a:spAutoFit/>
-          </a:bodyPr>
-          <a:lstStyle/>
-          <a:p>
-            <a:pPr>
-              <a:spcAft>
-                <a:spcPts val="1710"/>
-              </a:spcAft>
-            </a:pPr>
-            <a:r>
-              <a:rPr sz="3800" b="1">
-                <a:solidFill>
-                  <a:srgbClr val="1F2A44"/>
-                </a:solidFill>
-                <a:latin typeface="Fredoka"/>
-              </a:rPr>
-              <a:t>Escríbelo tú primero, sin mirar</a:t>
-            </a:r>
-          </a:p>
-        </p:txBody>
-      </p:sp>
-      <p:sp>
-        <p:nvSpPr>
-          <p:cNvPr id="4" name="TextBox 3"/>
-          <p:cNvSpPr txBox="1"/>
-          <p:nvPr/>
-        </p:nvSpPr>
-        <p:spPr>
-          <a:xfrm>
-            <a:off x="640000" y="1800000"/>
-            <a:ext cx="10912000" cy="1500000"/>
-          </a:xfrm>
-          <a:prstGeom prst="rect">
-            <a:avLst/>
-          </a:prstGeom>
-          <a:noFill/>
-        </p:spPr>
-        <p:txBody>
-          <a:bodyPr wrap="square">
-            <a:spAutoFit/>
-          </a:bodyPr>
-          <a:lstStyle/>
-          <a:p>
-            <a:pPr>
-              <a:spcAft>
-                <a:spcPts val="1170"/>
-              </a:spcAft>
-            </a:pPr>
-            <a:r>
-              <a:rPr sz="2600" b="0">
-                <a:solidFill>
-                  <a:srgbClr val="4A5568"/>
-                </a:solidFill>
-                <a:latin typeface="Nunito Sans"/>
-              </a:rPr>
-              <a:t>Dos minutos. Después lo comparamos.</a:t>
             </a:r>
           </a:p>
         </p:txBody>
@@ -5205,8 +5185,8 @@
         </p:nvSpPr>
         <p:spPr>
           <a:xfrm>
-            <a:off x="640000" y="1300000"/>
-            <a:ext cx="10912000" cy="4800000"/>
+            <a:off x="640000" y="760000"/>
+            <a:ext cx="10912000" cy="800000"/>
           </a:xfrm>
           <a:prstGeom prst="rect">
             <a:avLst/>
@@ -5221,76 +5201,56 @@
           <a:p>
             <a:pPr>
               <a:spcAft>
-                <a:spcPts val="1350"/>
+                <a:spcPts val="1710"/>
               </a:spcAft>
             </a:pPr>
             <a:r>
-              <a:rPr sz="3000" b="1">
-                <a:solidFill>
-                  <a:srgbClr val="E8793A"/>
-                </a:solidFill>
-                <a:latin typeface="Nunito Sans"/>
-              </a:rPr>
-              <a:t>1. </a:t>
-            </a:r>
-            <a:r>
-              <a:rPr sz="3000" b="0">
+              <a:rPr sz="3800" b="1">
                 <a:solidFill>
                   <a:srgbClr val="1F2A44"/>
                 </a:solidFill>
-                <a:latin typeface="Nunito Sans"/>
-              </a:rPr>
-              <a:t>Un sesgo cognitivo es un error del pensamiento que se repite de forma predecible.</a:t>
-            </a:r>
-          </a:p>
+                <a:latin typeface="Fredoka"/>
+              </a:rPr>
+              <a:t>Escríbelo tú primero, sin mirar</a:t>
+            </a:r>
+          </a:p>
+        </p:txBody>
+      </p:sp>
+      <p:sp>
+        <p:nvSpPr>
+          <p:cNvPr id="4" name="TextBox 3"/>
+          <p:cNvSpPr txBox="1"/>
+          <p:nvPr/>
+        </p:nvSpPr>
+        <p:spPr>
+          <a:xfrm>
+            <a:off x="640000" y="1800000"/>
+            <a:ext cx="10912000" cy="1500000"/>
+          </a:xfrm>
+          <a:prstGeom prst="rect">
+            <a:avLst/>
+          </a:prstGeom>
+          <a:noFill/>
+        </p:spPr>
+        <p:txBody>
+          <a:bodyPr wrap="square">
+            <a:spAutoFit/>
+          </a:bodyPr>
+          <a:lstStyle/>
           <a:p>
             <a:pPr>
               <a:spcAft>
-                <a:spcPts val="1350"/>
+                <a:spcPts val="1170"/>
               </a:spcAft>
             </a:pPr>
             <a:r>
-              <a:rPr sz="3000" b="1">
-                <a:solidFill>
-                  <a:srgbClr val="E8793A"/>
-                </a:solidFill>
-                <a:latin typeface="Nunito Sans"/>
-              </a:rPr>
-              <a:t>2. </a:t>
-            </a:r>
-            <a:r>
-              <a:rPr sz="3000" b="0">
-                <a:solidFill>
-                  <a:srgbClr val="1F2A44"/>
-                </a:solidFill>
-                <a:latin typeface="Nunito Sans"/>
-              </a:rPr>
-              <a:t>Viene de atajos mentales que casi siempre nos ayudan: decidir rápido no es un error.</a:t>
-            </a:r>
-          </a:p>
-          <a:p>
-            <a:pPr>
-              <a:spcAft>
-                <a:spcPts val="1350"/>
-              </a:spcAft>
-            </a:pPr>
-            <a:r>
-              <a:rPr sz="3000" b="1">
-                <a:solidFill>
-                  <a:srgbClr val="E8793A"/>
-                </a:solidFill>
-                <a:latin typeface="Nunito Sans"/>
-              </a:rPr>
-              <a:t>3. </a:t>
-            </a:r>
-            <a:r>
-              <a:rPr sz="3000" b="0">
-                <a:solidFill>
-                  <a:srgbClr val="1F2A44"/>
-                </a:solidFill>
-                <a:latin typeface="Nunito Sans"/>
-              </a:rPr>
-              <a:t>Pensar despacio y comprobar ayuda a corregir los sesgos.</a:t>
+              <a:rPr sz="2600" b="0">
+                <a:solidFill>
+                  <a:srgbClr val="4A5568"/>
+                </a:solidFill>
+                <a:latin typeface="Nunito Sans"/>
+              </a:rPr>
+              <a:t>Dos minutos. Después lo comparamos.</a:t>
             </a:r>
           </a:p>
         </p:txBody>
@@ -5309,7 +5269,7 @@
     <p:bg>
       <p:bgPr>
         <a:solidFill>
-          <a:srgbClr val="1F2A44"/>
+          <a:srgbClr val="FBF7EF"/>
         </a:solidFill>
         <a:effectLst/>
       </p:bgPr>
@@ -5351,11 +5311,11 @@
             <a:r>
               <a:rPr sz="1400" b="1">
                 <a:solidFill>
-                  <a:srgbClr val="F4B183"/>
-                </a:solidFill>
-                <a:latin typeface="Nunito Sans"/>
-              </a:rPr>
-              <a:t>VÍDEO</a:t>
+                  <a:srgbClr val="E8793A"/>
+                </a:solidFill>
+                <a:latin typeface="Nunito Sans"/>
+              </a:rPr>
+              <a:t>LO DE HOY EN TRES LÍNEAS</a:t>
             </a:r>
           </a:p>
         </p:txBody>
@@ -5368,8 +5328,8 @@
         </p:nvSpPr>
         <p:spPr>
           <a:xfrm>
-            <a:off x="640000" y="760000"/>
-            <a:ext cx="10912000" cy="800000"/>
+            <a:off x="640000" y="1300000"/>
+            <a:ext cx="10912000" cy="4800000"/>
           </a:xfrm>
           <a:prstGeom prst="rect">
             <a:avLst/>
@@ -5384,56 +5344,76 @@
           <a:p>
             <a:pPr>
               <a:spcAft>
-                <a:spcPts val="1620"/>
+                <a:spcPts val="1350"/>
               </a:spcAft>
             </a:pPr>
             <a:r>
-              <a:rPr sz="3600" b="1">
-                <a:solidFill>
-                  <a:srgbClr val="FBF7EF"/>
-                </a:solidFill>
-                <a:latin typeface="Fredoka"/>
-              </a:rPr>
-              <a:t>Qué son los sesgos cognitivos</a:t>
-            </a:r>
-          </a:p>
-        </p:txBody>
-      </p:sp>
-      <p:sp>
-        <p:nvSpPr>
-          <p:cNvPr id="4" name="TextBox 3"/>
-          <p:cNvSpPr txBox="1"/>
-          <p:nvPr/>
-        </p:nvSpPr>
-        <p:spPr>
-          <a:xfrm>
-            <a:off x="640000" y="2200000"/>
-            <a:ext cx="10912000" cy="2000000"/>
-          </a:xfrm>
-          <a:prstGeom prst="rect">
-            <a:avLst/>
-          </a:prstGeom>
-          <a:noFill/>
-        </p:spPr>
-        <p:txBody>
-          <a:bodyPr wrap="square">
-            <a:spAutoFit/>
-          </a:bodyPr>
-          <a:lstStyle/>
+              <a:rPr sz="3000" b="1">
+                <a:solidFill>
+                  <a:srgbClr val="E8793A"/>
+                </a:solidFill>
+                <a:latin typeface="Nunito Sans"/>
+              </a:rPr>
+              <a:t>1. </a:t>
+            </a:r>
+            <a:r>
+              <a:rPr sz="3000" b="0">
+                <a:solidFill>
+                  <a:srgbClr val="1F2A44"/>
+                </a:solidFill>
+                <a:latin typeface="Nunito Sans"/>
+              </a:rPr>
+              <a:t>Un sesgo cognitivo es un error del pensamiento que se repite de forma predecible.</a:t>
+            </a:r>
+          </a:p>
           <a:p>
             <a:pPr>
               <a:spcAft>
-                <a:spcPts val="1080"/>
+                <a:spcPts val="1350"/>
               </a:spcAft>
             </a:pPr>
             <a:r>
-              <a:rPr sz="2400" b="0">
-                <a:solidFill>
-                  <a:srgbClr val="C9D3E6"/>
-                </a:solidFill>
-                <a:latin typeface="Nunito Sans"/>
-              </a:rPr>
-              <a:t>Ver otros ejemplos de atajos mentales que fallan.</a:t>
+              <a:rPr sz="3000" b="1">
+                <a:solidFill>
+                  <a:srgbClr val="E8793A"/>
+                </a:solidFill>
+                <a:latin typeface="Nunito Sans"/>
+              </a:rPr>
+              <a:t>2. </a:t>
+            </a:r>
+            <a:r>
+              <a:rPr sz="3000" b="0">
+                <a:solidFill>
+                  <a:srgbClr val="1F2A44"/>
+                </a:solidFill>
+                <a:latin typeface="Nunito Sans"/>
+              </a:rPr>
+              <a:t>Viene de atajos mentales que casi siempre nos ayudan: decidir rápido no es un error.</a:t>
+            </a:r>
+          </a:p>
+          <a:p>
+            <a:pPr>
+              <a:spcAft>
+                <a:spcPts val="1350"/>
+              </a:spcAft>
+            </a:pPr>
+            <a:r>
+              <a:rPr sz="3000" b="1">
+                <a:solidFill>
+                  <a:srgbClr val="E8793A"/>
+                </a:solidFill>
+                <a:latin typeface="Nunito Sans"/>
+              </a:rPr>
+              <a:t>3. </a:t>
+            </a:r>
+            <a:r>
+              <a:rPr sz="3000" b="0">
+                <a:solidFill>
+                  <a:srgbClr val="1F2A44"/>
+                </a:solidFill>
+                <a:latin typeface="Nunito Sans"/>
+              </a:rPr>
+              <a:t>Pensar despacio y comprobar ayuda a corregir los sesgos.</a:t>
             </a:r>
           </a:p>
         </p:txBody>
@@ -5498,6 +5478,149 @@
                 </a:solidFill>
                 <a:latin typeface="Nunito Sans"/>
               </a:rPr>
+              <a:t>VÍDEO</a:t>
+            </a:r>
+          </a:p>
+        </p:txBody>
+      </p:sp>
+      <p:sp>
+        <p:nvSpPr>
+          <p:cNvPr id="3" name="TextBox 2"/>
+          <p:cNvSpPr txBox="1"/>
+          <p:nvPr/>
+        </p:nvSpPr>
+        <p:spPr>
+          <a:xfrm>
+            <a:off x="640000" y="760000"/>
+            <a:ext cx="10912000" cy="800000"/>
+          </a:xfrm>
+          <a:prstGeom prst="rect">
+            <a:avLst/>
+          </a:prstGeom>
+          <a:noFill/>
+        </p:spPr>
+        <p:txBody>
+          <a:bodyPr wrap="square">
+            <a:spAutoFit/>
+          </a:bodyPr>
+          <a:lstStyle/>
+          <a:p>
+            <a:pPr>
+              <a:spcAft>
+                <a:spcPts val="1620"/>
+              </a:spcAft>
+            </a:pPr>
+            <a:r>
+              <a:rPr sz="3600" b="1">
+                <a:solidFill>
+                  <a:srgbClr val="FBF7EF"/>
+                </a:solidFill>
+                <a:latin typeface="Fredoka"/>
+              </a:rPr>
+              <a:t>Qué son los sesgos cognitivos</a:t>
+            </a:r>
+          </a:p>
+        </p:txBody>
+      </p:sp>
+      <p:sp>
+        <p:nvSpPr>
+          <p:cNvPr id="4" name="TextBox 3"/>
+          <p:cNvSpPr txBox="1"/>
+          <p:nvPr/>
+        </p:nvSpPr>
+        <p:spPr>
+          <a:xfrm>
+            <a:off x="640000" y="2200000"/>
+            <a:ext cx="10912000" cy="2000000"/>
+          </a:xfrm>
+          <a:prstGeom prst="rect">
+            <a:avLst/>
+          </a:prstGeom>
+          <a:noFill/>
+        </p:spPr>
+        <p:txBody>
+          <a:bodyPr wrap="square">
+            <a:spAutoFit/>
+          </a:bodyPr>
+          <a:lstStyle/>
+          <a:p>
+            <a:pPr>
+              <a:spcAft>
+                <a:spcPts val="1080"/>
+              </a:spcAft>
+            </a:pPr>
+            <a:r>
+              <a:rPr sz="2400" b="0">
+                <a:solidFill>
+                  <a:srgbClr val="C9D3E6"/>
+                </a:solidFill>
+                <a:latin typeface="Nunito Sans"/>
+              </a:rPr>
+              <a:t>Ver otros ejemplos de atajos mentales que fallan.</a:t>
+            </a:r>
+          </a:p>
+        </p:txBody>
+      </p:sp>
+    </p:spTree>
+  </p:cSld>
+  <p:clrMapOvr>
+    <a:masterClrMapping/>
+  </p:clrMapOvr>
+</p:sld>
+</file>
+
+<file path=ppt/slides/slide17.xml><?xml version="1.0" encoding="utf-8"?>
+<p:sld xmlns:a="http://schemas.openxmlformats.org/drawingml/2006/main" xmlns:p="http://schemas.openxmlformats.org/presentationml/2006/main" xmlns:r="http://schemas.openxmlformats.org/officeDocument/2006/relationships">
+  <p:cSld>
+    <p:bg>
+      <p:bgPr>
+        <a:solidFill>
+          <a:srgbClr val="1F2A44"/>
+        </a:solidFill>
+        <a:effectLst/>
+      </p:bgPr>
+    </p:bg>
+    <p:spTree>
+      <p:nvGrpSpPr>
+        <p:cNvPr id="1" name=""/>
+        <p:cNvGrpSpPr/>
+        <p:nvPr/>
+      </p:nvGrpSpPr>
+      <p:grpSpPr/>
+      <p:sp>
+        <p:nvSpPr>
+          <p:cNvPr id="2" name="TextBox 1"/>
+          <p:cNvSpPr txBox="1"/>
+          <p:nvPr/>
+        </p:nvSpPr>
+        <p:spPr>
+          <a:xfrm>
+            <a:off x="640000" y="380000"/>
+            <a:ext cx="10912000" cy="420000"/>
+          </a:xfrm>
+          <a:prstGeom prst="rect">
+            <a:avLst/>
+          </a:prstGeom>
+          <a:noFill/>
+        </p:spPr>
+        <p:txBody>
+          <a:bodyPr wrap="square">
+            <a:spAutoFit/>
+          </a:bodyPr>
+          <a:lstStyle/>
+          <a:p>
+            <a:pPr>
+              <a:spcAft>
+                <a:spcPts val="630"/>
+              </a:spcAft>
+            </a:pPr>
+            <a:r>
+              <a:rPr sz="1400" b="1">
+                <a:solidFill>
+                  <a:srgbClr val="F4B183"/>
+                </a:solidFill>
+                <a:latin typeface="Nunito Sans"/>
+              </a:rPr>
               <a:t>AHORA, LA HOJA DEL DÍA</a:t>
             </a:r>
           </a:p>
@@ -7055,6 +7178,488 @@
 </file>
 
 <file path=ppt/slides/slide7.xml><?xml version="1.0" encoding="utf-8"?>
+<p:sld xmlns:a="http://schemas.openxmlformats.org/drawingml/2006/main" xmlns:p="http://schemas.openxmlformats.org/presentationml/2006/main" xmlns:r="http://schemas.openxmlformats.org/officeDocument/2006/relationships">
+  <p:cSld>
+    <p:bg>
+      <p:bgPr>
+        <a:solidFill>
+          <a:srgbClr val="FBF7EF"/>
+        </a:solidFill>
+        <a:effectLst/>
+      </p:bgPr>
+    </p:bg>
+    <p:spTree>
+      <p:nvGrpSpPr>
+        <p:cNvPr id="1" name=""/>
+        <p:cNvGrpSpPr/>
+        <p:nvPr/>
+      </p:nvGrpSpPr>
+      <p:grpSpPr/>
+      <p:sp>
+        <p:nvSpPr>
+          <p:cNvPr id="2" name="TextBox 1"/>
+          <p:cNvSpPr txBox="1"/>
+          <p:nvPr/>
+        </p:nvSpPr>
+        <p:spPr>
+          <a:xfrm>
+            <a:off x="640000" y="380000"/>
+            <a:ext cx="10912000" cy="420000"/>
+          </a:xfrm>
+          <a:prstGeom prst="rect">
+            <a:avLst/>
+          </a:prstGeom>
+          <a:noFill/>
+        </p:spPr>
+        <p:txBody>
+          <a:bodyPr wrap="square">
+            <a:spAutoFit/>
+          </a:bodyPr>
+          <a:lstStyle/>
+          <a:p>
+            <a:pPr>
+              <a:spcAft>
+                <a:spcPts val="630"/>
+              </a:spcAft>
+            </a:pPr>
+            <a:r>
+              <a:rPr sz="1400" b="1">
+                <a:solidFill>
+                  <a:srgbClr val="E8793A"/>
+                </a:solidFill>
+                <a:latin typeface="Nunito Sans"/>
+              </a:rPr>
+              <a:t>BLOQUE 1 · ATAJOS QUE FALLAN</a:t>
+            </a:r>
+          </a:p>
+        </p:txBody>
+      </p:sp>
+      <p:sp>
+        <p:nvSpPr>
+          <p:cNvPr id="3" name="TextBox 2"/>
+          <p:cNvSpPr txBox="1"/>
+          <p:nvPr/>
+        </p:nvSpPr>
+        <p:spPr>
+          <a:xfrm>
+            <a:off x="640000" y="760000"/>
+            <a:ext cx="10912000" cy="800000"/>
+          </a:xfrm>
+          <a:prstGeom prst="rect">
+            <a:avLst/>
+          </a:prstGeom>
+          <a:noFill/>
+        </p:spPr>
+        <p:txBody>
+          <a:bodyPr wrap="square">
+            <a:spAutoFit/>
+          </a:bodyPr>
+          <a:lstStyle/>
+          <a:p>
+            <a:pPr>
+              <a:spcAft>
+                <a:spcPts val="1710"/>
+              </a:spcAft>
+            </a:pPr>
+            <a:r>
+              <a:rPr sz="3800" b="1">
+                <a:solidFill>
+                  <a:srgbClr val="1F2A44"/>
+                </a:solidFill>
+                <a:latin typeface="Fredoka"/>
+              </a:rPr>
+              <a:t>Falacia o sesgo: ¿dónde está el fallo?</a:t>
+            </a:r>
+          </a:p>
+        </p:txBody>
+      </p:sp>
+      <p:sp>
+        <p:nvSpPr>
+          <p:cNvPr id="4" name="Rectangle 3"/>
+          <p:cNvSpPr/>
+          <p:nvPr/>
+        </p:nvSpPr>
+        <p:spPr>
+          <a:xfrm>
+            <a:off x="640000" y="1650000"/>
+            <a:ext cx="5306000" cy="4400000"/>
+          </a:xfrm>
+          <a:prstGeom prst="rect">
+            <a:avLst/>
+          </a:prstGeom>
+          <a:solidFill>
+            <a:srgbClr val="FBE3D2"/>
+          </a:solidFill>
+          <a:ln>
+            <a:noFill/>
+          </a:ln>
+        </p:spPr>
+        <p:style>
+          <a:lnRef idx="1">
+            <a:schemeClr val="accent1"/>
+          </a:lnRef>
+          <a:fillRef idx="3">
+            <a:schemeClr val="accent1"/>
+          </a:fillRef>
+          <a:effectRef idx="2">
+            <a:schemeClr val="accent1"/>
+          </a:effectRef>
+          <a:fontRef idx="minor">
+            <a:schemeClr val="lt1"/>
+          </a:fontRef>
+        </p:style>
+        <p:txBody>
+          <a:bodyPr rtlCol="0" anchor="ctr"/>
+          <a:lstStyle/>
+          <a:p>
+            <a:pPr algn="ctr"/>
+          </a:p>
+        </p:txBody>
+      </p:sp>
+      <p:sp>
+        <p:nvSpPr>
+          <p:cNvPr id="5" name="TextBox 4"/>
+          <p:cNvSpPr txBox="1"/>
+          <p:nvPr/>
+        </p:nvSpPr>
+        <p:spPr>
+          <a:xfrm>
+            <a:off x="840000" y="1750000"/>
+            <a:ext cx="4906000" cy="600000"/>
+          </a:xfrm>
+          <a:prstGeom prst="rect">
+            <a:avLst/>
+          </a:prstGeom>
+          <a:noFill/>
+        </p:spPr>
+        <p:txBody>
+          <a:bodyPr wrap="square">
+            <a:spAutoFit/>
+          </a:bodyPr>
+          <a:lstStyle/>
+          <a:p>
+            <a:pPr>
+              <a:spcAft>
+                <a:spcPts val="1260"/>
+              </a:spcAft>
+            </a:pPr>
+            <a:r>
+              <a:rPr sz="2800" b="1">
+                <a:solidFill>
+                  <a:srgbClr val="C2531C"/>
+                </a:solidFill>
+                <a:latin typeface="Nunito Sans"/>
+              </a:rPr>
+              <a:t>Falacia: fuera</a:t>
+            </a:r>
+          </a:p>
+        </p:txBody>
+      </p:sp>
+      <p:sp>
+        <p:nvSpPr>
+          <p:cNvPr id="6" name="TextBox 5"/>
+          <p:cNvSpPr txBox="1"/>
+          <p:nvPr/>
+        </p:nvSpPr>
+        <p:spPr>
+          <a:xfrm>
+            <a:off x="840000" y="2400000"/>
+            <a:ext cx="4906000" cy="3500000"/>
+          </a:xfrm>
+          <a:prstGeom prst="rect">
+            <a:avLst/>
+          </a:prstGeom>
+          <a:noFill/>
+        </p:spPr>
+        <p:txBody>
+          <a:bodyPr wrap="square">
+            <a:spAutoFit/>
+          </a:bodyPr>
+          <a:lstStyle/>
+          <a:p>
+            <a:pPr>
+              <a:spcAft>
+                <a:spcPts val="1170"/>
+              </a:spcAft>
+            </a:pPr>
+            <a:r>
+              <a:rPr sz="2600" b="1">
+                <a:solidFill>
+                  <a:srgbClr val="E8793A"/>
+                </a:solidFill>
+                <a:latin typeface="Nunito Sans"/>
+              </a:rPr>
+              <a:t>• </a:t>
+            </a:r>
+            <a:r>
+              <a:rPr sz="2600" b="0">
+                <a:solidFill>
+                  <a:srgbClr val="1F2A44"/>
+                </a:solidFill>
+                <a:latin typeface="Nunito Sans"/>
+              </a:rPr>
+              <a:t>El fallo está en el </a:t>
+            </a:r>
+            <a:r>
+              <a:rPr sz="2600" b="1">
+                <a:solidFill>
+                  <a:srgbClr val="1F2A44"/>
+                </a:solidFill>
+                <a:latin typeface="Nunito Sans"/>
+              </a:rPr>
+              <a:t>argumento</a:t>
+            </a:r>
+          </a:p>
+          <a:p>
+            <a:pPr>
+              <a:spcAft>
+                <a:spcPts val="1170"/>
+              </a:spcAft>
+            </a:pPr>
+            <a:r>
+              <a:rPr sz="2600" b="1">
+                <a:solidFill>
+                  <a:srgbClr val="E8793A"/>
+                </a:solidFill>
+                <a:latin typeface="Nunito Sans"/>
+              </a:rPr>
+              <a:t>• </a:t>
+            </a:r>
+            <a:r>
+              <a:rPr sz="2600" b="0">
+                <a:solidFill>
+                  <a:srgbClr val="1F2A44"/>
+                </a:solidFill>
+                <a:latin typeface="Nunito Sans"/>
+              </a:rPr>
+              <a:t>Se ve en lo que alguien dice o escribe</a:t>
+            </a:r>
+          </a:p>
+          <a:p>
+            <a:pPr>
+              <a:spcAft>
+                <a:spcPts val="1170"/>
+              </a:spcAft>
+            </a:pPr>
+            <a:r>
+              <a:rPr sz="2600" b="1">
+                <a:solidFill>
+                  <a:srgbClr val="E8793A"/>
+                </a:solidFill>
+                <a:latin typeface="Nunito Sans"/>
+              </a:rPr>
+              <a:t>• </a:t>
+            </a:r>
+            <a:r>
+              <a:rPr sz="2600" b="0">
+                <a:solidFill>
+                  <a:srgbClr val="1F2A44"/>
+                </a:solidFill>
+                <a:latin typeface="Nunito Sans"/>
+              </a:rPr>
+              <a:t>Ejemplo: atacar a la persona en vez de a su idea</a:t>
+            </a:r>
+          </a:p>
+        </p:txBody>
+      </p:sp>
+      <p:sp>
+        <p:nvSpPr>
+          <p:cNvPr id="7" name="Rectangle 6"/>
+          <p:cNvSpPr/>
+          <p:nvPr/>
+        </p:nvSpPr>
+        <p:spPr>
+          <a:xfrm>
+            <a:off x="6246000" y="1650000"/>
+            <a:ext cx="5306000" cy="4400000"/>
+          </a:xfrm>
+          <a:prstGeom prst="rect">
+            <a:avLst/>
+          </a:prstGeom>
+          <a:solidFill>
+            <a:srgbClr val="EAF0F7"/>
+          </a:solidFill>
+          <a:ln>
+            <a:noFill/>
+          </a:ln>
+        </p:spPr>
+        <p:style>
+          <a:lnRef idx="1">
+            <a:schemeClr val="accent1"/>
+          </a:lnRef>
+          <a:fillRef idx="3">
+            <a:schemeClr val="accent1"/>
+          </a:fillRef>
+          <a:effectRef idx="2">
+            <a:schemeClr val="accent1"/>
+          </a:effectRef>
+          <a:fontRef idx="minor">
+            <a:schemeClr val="lt1"/>
+          </a:fontRef>
+        </p:style>
+        <p:txBody>
+          <a:bodyPr rtlCol="0" anchor="ctr"/>
+          <a:lstStyle/>
+          <a:p>
+            <a:pPr algn="ctr"/>
+          </a:p>
+        </p:txBody>
+      </p:sp>
+      <p:sp>
+        <p:nvSpPr>
+          <p:cNvPr id="8" name="TextBox 7"/>
+          <p:cNvSpPr txBox="1"/>
+          <p:nvPr/>
+        </p:nvSpPr>
+        <p:spPr>
+          <a:xfrm>
+            <a:off x="6446000" y="1750000"/>
+            <a:ext cx="4906000" cy="600000"/>
+          </a:xfrm>
+          <a:prstGeom prst="rect">
+            <a:avLst/>
+          </a:prstGeom>
+          <a:noFill/>
+        </p:spPr>
+        <p:txBody>
+          <a:bodyPr wrap="square">
+            <a:spAutoFit/>
+          </a:bodyPr>
+          <a:lstStyle/>
+          <a:p>
+            <a:pPr>
+              <a:spcAft>
+                <a:spcPts val="1260"/>
+              </a:spcAft>
+            </a:pPr>
+            <a:r>
+              <a:rPr sz="2800" b="1">
+                <a:solidFill>
+                  <a:srgbClr val="2F6FB5"/>
+                </a:solidFill>
+                <a:latin typeface="Nunito Sans"/>
+              </a:rPr>
+              <a:t>Sesgo: dentro</a:t>
+            </a:r>
+          </a:p>
+        </p:txBody>
+      </p:sp>
+      <p:sp>
+        <p:nvSpPr>
+          <p:cNvPr id="9" name="TextBox 8"/>
+          <p:cNvSpPr txBox="1"/>
+          <p:nvPr/>
+        </p:nvSpPr>
+        <p:spPr>
+          <a:xfrm>
+            <a:off x="6446000" y="2400000"/>
+            <a:ext cx="4906000" cy="3500000"/>
+          </a:xfrm>
+          <a:prstGeom prst="rect">
+            <a:avLst/>
+          </a:prstGeom>
+          <a:noFill/>
+        </p:spPr>
+        <p:txBody>
+          <a:bodyPr wrap="square">
+            <a:spAutoFit/>
+          </a:bodyPr>
+          <a:lstStyle/>
+          <a:p>
+            <a:pPr>
+              <a:spcAft>
+                <a:spcPts val="1170"/>
+              </a:spcAft>
+            </a:pPr>
+            <a:r>
+              <a:rPr sz="2600" b="1">
+                <a:solidFill>
+                  <a:srgbClr val="E8793A"/>
+                </a:solidFill>
+                <a:latin typeface="Nunito Sans"/>
+              </a:rPr>
+              <a:t>• </a:t>
+            </a:r>
+            <a:r>
+              <a:rPr sz="2600" b="0">
+                <a:solidFill>
+                  <a:srgbClr val="1F2A44"/>
+                </a:solidFill>
+                <a:latin typeface="Nunito Sans"/>
+              </a:rPr>
+              <a:t>El atajo que falla está en mi </a:t>
+            </a:r>
+            <a:r>
+              <a:rPr sz="2600" b="1">
+                <a:solidFill>
+                  <a:srgbClr val="1F2A44"/>
+                </a:solidFill>
+                <a:latin typeface="Nunito Sans"/>
+              </a:rPr>
+              <a:t>cabeza</a:t>
+            </a:r>
+          </a:p>
+          <a:p>
+            <a:pPr>
+              <a:spcAft>
+                <a:spcPts val="1170"/>
+              </a:spcAft>
+            </a:pPr>
+            <a:r>
+              <a:rPr sz="2600" b="1">
+                <a:solidFill>
+                  <a:srgbClr val="E8793A"/>
+                </a:solidFill>
+                <a:latin typeface="Nunito Sans"/>
+              </a:rPr>
+              <a:t>• </a:t>
+            </a:r>
+            <a:r>
+              <a:rPr sz="2600" b="0">
+                <a:solidFill>
+                  <a:srgbClr val="1F2A44"/>
+                </a:solidFill>
+                <a:latin typeface="Nunito Sans"/>
+              </a:rPr>
+              <a:t>Me pasa aunque nadie me quiera engañar</a:t>
+            </a:r>
+          </a:p>
+          <a:p>
+            <a:pPr>
+              <a:spcAft>
+                <a:spcPts val="1170"/>
+              </a:spcAft>
+            </a:pPr>
+            <a:r>
+              <a:rPr sz="2600" b="1">
+                <a:solidFill>
+                  <a:srgbClr val="E8793A"/>
+                </a:solidFill>
+                <a:latin typeface="Nunito Sans"/>
+              </a:rPr>
+              <a:t>• </a:t>
+            </a:r>
+            <a:r>
+              <a:rPr sz="2600" b="0">
+                <a:solidFill>
+                  <a:srgbClr val="1F2A44"/>
+                </a:solidFill>
+                <a:latin typeface="Nunito Sans"/>
+              </a:rPr>
+              <a:t>Ejemplo: decir rápido que la pelota cuesta 10 céntimos</a:t>
+            </a:r>
+          </a:p>
+        </p:txBody>
+      </p:sp>
+    </p:spTree>
+  </p:cSld>
+  <p:clrMapOvr>
+    <a:masterClrMapping/>
+  </p:clrMapOvr>
+</p:sld>
+</file>
+
+<file path=ppt/slides/slide8.xml><?xml version="1.0" encoding="utf-8"?>
 <p:sld xmlns:a="http://schemas.openxmlformats.org/drawingml/2006/main" xmlns:p="http://schemas.openxmlformats.org/presentationml/2006/main" xmlns:r="http://schemas.openxmlformats.org/officeDocument/2006/relationships">
   <p:cSld>
     <p:bg>
@@ -7457,7 +8062,7 @@
 </p:sld>
 </file>
 
-<file path=ppt/slides/slide8.xml><?xml version="1.0" encoding="utf-8"?>
+<file path=ppt/slides/slide9.xml><?xml version="1.0" encoding="utf-8"?>
 <p:sld xmlns:a="http://schemas.openxmlformats.org/drawingml/2006/main" xmlns:p="http://schemas.openxmlformats.org/presentationml/2006/main" xmlns:r="http://schemas.openxmlformats.org/officeDocument/2006/relationships">
   <p:cSld>
     <p:bg>
@@ -7690,110 +8295,6 @@
                 <a:latin typeface="Nunito Sans"/>
               </a:rPr>
               <a:t>: eso es un sesgo</a:t>
-            </a:r>
-          </a:p>
-        </p:txBody>
-      </p:sp>
-    </p:spTree>
-  </p:cSld>
-  <p:clrMapOvr>
-    <a:masterClrMapping/>
-  </p:clrMapOvr>
-</p:sld>
-</file>
-
-<file path=ppt/slides/slide9.xml><?xml version="1.0" encoding="utf-8"?>
-<p:sld xmlns:a="http://schemas.openxmlformats.org/drawingml/2006/main" xmlns:p="http://schemas.openxmlformats.org/presentationml/2006/main" xmlns:r="http://schemas.openxmlformats.org/officeDocument/2006/relationships">
-  <p:cSld>
-    <p:bg>
-      <p:bgPr>
-        <a:solidFill>
-          <a:srgbClr val="1F2A44"/>
-        </a:solidFill>
-        <a:effectLst/>
-      </p:bgPr>
-    </p:bg>
-    <p:spTree>
-      <p:nvGrpSpPr>
-        <p:cNvPr id="1" name=""/>
-        <p:cNvGrpSpPr/>
-        <p:nvPr/>
-      </p:nvGrpSpPr>
-      <p:grpSpPr/>
-      <p:sp>
-        <p:nvSpPr>
-          <p:cNvPr id="2" name="TextBox 1"/>
-          <p:cNvSpPr txBox="1"/>
-          <p:nvPr/>
-        </p:nvSpPr>
-        <p:spPr>
-          <a:xfrm>
-            <a:off x="640000" y="2300000"/>
-            <a:ext cx="10912000" cy="500000"/>
-          </a:xfrm>
-          <a:prstGeom prst="rect">
-            <a:avLst/>
-          </a:prstGeom>
-          <a:noFill/>
-        </p:spPr>
-        <p:txBody>
-          <a:bodyPr wrap="square">
-            <a:spAutoFit/>
-          </a:bodyPr>
-          <a:lstStyle/>
-          <a:p>
-            <a:pPr>
-              <a:spcAft>
-                <a:spcPts val="810"/>
-              </a:spcAft>
-            </a:pPr>
-            <a:r>
-              <a:rPr sz="1800" b="1">
-                <a:solidFill>
-                  <a:srgbClr val="F4B183"/>
-                </a:solidFill>
-                <a:latin typeface="Nunito Sans"/>
-              </a:rPr>
-              <a:t>BLOQUE 2</a:t>
-            </a:r>
-          </a:p>
-        </p:txBody>
-      </p:sp>
-      <p:sp>
-        <p:nvSpPr>
-          <p:cNvPr id="3" name="TextBox 2"/>
-          <p:cNvSpPr txBox="1"/>
-          <p:nvPr/>
-        </p:nvSpPr>
-        <p:spPr>
-          <a:xfrm>
-            <a:off x="640000" y="2800000"/>
-            <a:ext cx="10912000" cy="800000"/>
-          </a:xfrm>
-          <a:prstGeom prst="rect">
-            <a:avLst/>
-          </a:prstGeom>
-          <a:noFill/>
-        </p:spPr>
-        <p:txBody>
-          <a:bodyPr wrap="square">
-            <a:spAutoFit/>
-          </a:bodyPr>
-          <a:lstStyle/>
-          <a:p>
-            <a:pPr>
-              <a:spcAft>
-                <a:spcPts val="2160"/>
-              </a:spcAft>
-            </a:pPr>
-            <a:r>
-              <a:rPr sz="4800" b="1">
-                <a:solidFill>
-                  <a:srgbClr val="FBF7EF"/>
-                </a:solidFill>
-                <a:latin typeface="Fredoka"/>
-              </a:rPr>
-              <a:t>Casos resueltos</a:t>
             </a:r>
           </a:p>
         </p:txBody>

--- a/curso/pptx/S43.pptx
+++ b/curso/pptx/S43.pptx
@@ -471,426 +471,6 @@
     </a:lvl9pPr>
   </p:notesStyle>
 </p:notesMaster>
-</file>
-
-<file path=ppt/notesSlides/notesSlide1.xml><?xml version="1.0" encoding="utf-8"?>
-<p:notes xmlns:a="http://schemas.openxmlformats.org/drawingml/2006/main" xmlns:p="http://schemas.openxmlformats.org/presentationml/2006/main" xmlns:r="http://schemas.openxmlformats.org/officeDocument/2006/relationships">
-  <p:cSld>
-    <p:spTree>
-      <p:nvGrpSpPr>
-        <p:cNvPr id="1" name=""/>
-        <p:cNvGrpSpPr/>
-        <p:nvPr/>
-      </p:nvGrpSpPr>
-      <p:grpSpPr>
-        <a:xfrm>
-          <a:off x="0" y="0"/>
-          <a:ext cx="0" cy="0"/>
-          <a:chOff x="0" y="0"/>
-          <a:chExt cx="0" cy="0"/>
-        </a:xfrm>
-      </p:grpSpPr>
-      <p:sp>
-        <p:nvSpPr>
-          <p:cNvPr id="2" name="Slide Image Placeholder 1"/>
-          <p:cNvSpPr>
-            <a:spLocks noGrp="1"/>
-          </p:cNvSpPr>
-          <p:nvPr>
-            <p:ph type="sldImg" idx="2"/>
-          </p:nvPr>
-        </p:nvSpPr>
-        <p:spPr/>
-      </p:sp>
-      <p:sp>
-        <p:nvSpPr>
-          <p:cNvPr id="3" name="Notes Placeholder 2"/>
-          <p:cNvSpPr>
-            <a:spLocks noGrp="1"/>
-          </p:cNvSpPr>
-          <p:nvPr>
-            <p:ph type="body" idx="3" sz="quarter"/>
-          </p:nvPr>
-        </p:nvSpPr>
-        <p:spPr/>
-        <p:txBody>
-          <a:bodyPr/>
-          <a:lstStyle/>
-          <a:p>
-            <a:r>
-              <a:t>3 minutos. Sin apuntes. Es para recordar, no cuenta para nota.</a:t>
-            </a:r>
-          </a:p>
-        </p:txBody>
-      </p:sp>
-      <p:sp>
-        <p:nvSpPr>
-          <p:cNvPr id="4" name="Slide Number Placeholder 3"/>
-          <p:cNvSpPr>
-            <a:spLocks noGrp="1"/>
-          </p:cNvSpPr>
-          <p:nvPr>
-            <p:ph type="sldNum" idx="5" sz="quarter"/>
-          </p:nvPr>
-        </p:nvSpPr>
-        <p:spPr/>
-      </p:sp>
-    </p:spTree>
-  </p:cSld>
-  <p:clrMapOvr>
-    <a:masterClrMapping/>
-  </p:clrMapOvr>
-</p:notes>
-</file>
-
-<file path=ppt/notesSlides/notesSlide2.xml><?xml version="1.0" encoding="utf-8"?>
-<p:notes xmlns:a="http://schemas.openxmlformats.org/drawingml/2006/main" xmlns:p="http://schemas.openxmlformats.org/presentationml/2006/main" xmlns:r="http://schemas.openxmlformats.org/officeDocument/2006/relationships">
-  <p:cSld>
-    <p:spTree>
-      <p:nvGrpSpPr>
-        <p:cNvPr id="1" name=""/>
-        <p:cNvGrpSpPr/>
-        <p:nvPr/>
-      </p:nvGrpSpPr>
-      <p:grpSpPr>
-        <a:xfrm>
-          <a:off x="0" y="0"/>
-          <a:ext cx="0" cy="0"/>
-          <a:chOff x="0" y="0"/>
-          <a:chExt cx="0" cy="0"/>
-        </a:xfrm>
-      </p:grpSpPr>
-      <p:sp>
-        <p:nvSpPr>
-          <p:cNvPr id="2" name="Slide Image Placeholder 1"/>
-          <p:cNvSpPr>
-            <a:spLocks noGrp="1"/>
-          </p:cNvSpPr>
-          <p:nvPr>
-            <p:ph type="sldImg" idx="2"/>
-          </p:nvPr>
-        </p:nvSpPr>
-        <p:spPr/>
-      </p:sp>
-      <p:sp>
-        <p:nvSpPr>
-          <p:cNvPr id="3" name="Notes Placeholder 2"/>
-          <p:cNvSpPr>
-            <a:spLocks noGrp="1"/>
-          </p:cNvSpPr>
-          <p:nvPr>
-            <p:ph type="body" idx="3" sz="quarter"/>
-          </p:nvPr>
-        </p:nvSpPr>
-        <p:spPr/>
-        <p:txBody>
-          <a:bodyPr/>
-          <a:lstStyle/>
-          <a:p>
-            <a:r>
-              <a:t>3 minutos. Sin apuntes. Es para recordar, no cuenta para nota.</a:t>
-            </a:r>
-          </a:p>
-        </p:txBody>
-      </p:sp>
-      <p:sp>
-        <p:nvSpPr>
-          <p:cNvPr id="4" name="Slide Number Placeholder 3"/>
-          <p:cNvSpPr>
-            <a:spLocks noGrp="1"/>
-          </p:cNvSpPr>
-          <p:nvPr>
-            <p:ph type="sldNum" idx="5" sz="quarter"/>
-          </p:nvPr>
-        </p:nvSpPr>
-        <p:spPr/>
-      </p:sp>
-    </p:spTree>
-  </p:cSld>
-  <p:clrMapOvr>
-    <a:masterClrMapping/>
-  </p:clrMapOvr>
-</p:notes>
-</file>
-
-<file path=ppt/notesSlides/notesSlide3.xml><?xml version="1.0" encoding="utf-8"?>
-<p:notes xmlns:a="http://schemas.openxmlformats.org/drawingml/2006/main" xmlns:p="http://schemas.openxmlformats.org/presentationml/2006/main" xmlns:r="http://schemas.openxmlformats.org/officeDocument/2006/relationships">
-  <p:cSld>
-    <p:spTree>
-      <p:nvGrpSpPr>
-        <p:cNvPr id="1" name=""/>
-        <p:cNvGrpSpPr/>
-        <p:nvPr/>
-      </p:nvGrpSpPr>
-      <p:grpSpPr>
-        <a:xfrm>
-          <a:off x="0" y="0"/>
-          <a:ext cx="0" cy="0"/>
-          <a:chOff x="0" y="0"/>
-          <a:chExt cx="0" cy="0"/>
-        </a:xfrm>
-      </p:grpSpPr>
-      <p:sp>
-        <p:nvSpPr>
-          <p:cNvPr id="2" name="Slide Image Placeholder 1"/>
-          <p:cNvSpPr>
-            <a:spLocks noGrp="1"/>
-          </p:cNvSpPr>
-          <p:nvPr>
-            <p:ph type="sldImg" idx="2"/>
-          </p:nvPr>
-        </p:nvSpPr>
-        <p:spPr/>
-      </p:sp>
-      <p:sp>
-        <p:nvSpPr>
-          <p:cNvPr id="3" name="Notes Placeholder 2"/>
-          <p:cNvSpPr>
-            <a:spLocks noGrp="1"/>
-          </p:cNvSpPr>
-          <p:nvPr>
-            <p:ph type="body" idx="3" sz="quarter"/>
-          </p:nvPr>
-        </p:nvSpPr>
-        <p:spPr/>
-        <p:txBody>
-          <a:bodyPr/>
-          <a:lstStyle/>
-          <a:p>
-            <a:r>
-              <a:t>Nadie tiene que contestar: solo pensarlo.</a:t>
-            </a:r>
-          </a:p>
-        </p:txBody>
-      </p:sp>
-      <p:sp>
-        <p:nvSpPr>
-          <p:cNvPr id="4" name="Slide Number Placeholder 3"/>
-          <p:cNvSpPr>
-            <a:spLocks noGrp="1"/>
-          </p:cNvSpPr>
-          <p:nvPr>
-            <p:ph type="sldNum" idx="5" sz="quarter"/>
-          </p:nvPr>
-        </p:nvSpPr>
-        <p:spPr/>
-      </p:sp>
-    </p:spTree>
-  </p:cSld>
-  <p:clrMapOvr>
-    <a:masterClrMapping/>
-  </p:clrMapOvr>
-</p:notes>
-</file>
-
-<file path=ppt/notesSlides/notesSlide4.xml><?xml version="1.0" encoding="utf-8"?>
-<p:notes xmlns:a="http://schemas.openxmlformats.org/drawingml/2006/main" xmlns:p="http://schemas.openxmlformats.org/presentationml/2006/main" xmlns:r="http://schemas.openxmlformats.org/officeDocument/2006/relationships">
-  <p:cSld>
-    <p:spTree>
-      <p:nvGrpSpPr>
-        <p:cNvPr id="1" name=""/>
-        <p:cNvGrpSpPr/>
-        <p:nvPr/>
-      </p:nvGrpSpPr>
-      <p:grpSpPr>
-        <a:xfrm>
-          <a:off x="0" y="0"/>
-          <a:ext cx="0" cy="0"/>
-          <a:chOff x="0" y="0"/>
-          <a:chExt cx="0" cy="0"/>
-        </a:xfrm>
-      </p:grpSpPr>
-      <p:sp>
-        <p:nvSpPr>
-          <p:cNvPr id="2" name="Slide Image Placeholder 1"/>
-          <p:cNvSpPr>
-            <a:spLocks noGrp="1"/>
-          </p:cNvSpPr>
-          <p:nvPr>
-            <p:ph type="sldImg" idx="2"/>
-          </p:nvPr>
-        </p:nvSpPr>
-        <p:spPr/>
-      </p:sp>
-      <p:sp>
-        <p:nvSpPr>
-          <p:cNvPr id="3" name="Notes Placeholder 2"/>
-          <p:cNvSpPr>
-            <a:spLocks noGrp="1"/>
-          </p:cNvSpPr>
-          <p:nvPr>
-            <p:ph type="body" idx="3" sz="quarter"/>
-          </p:nvPr>
-        </p:nvSpPr>
-        <p:spPr/>
-        <p:txBody>
-          <a:bodyPr/>
-          <a:lstStyle/>
-          <a:p>
-            <a:r>
-              <a:t>Dejar unos segundos para que piensen la respuesta fácil antes de enseñar los pasos.</a:t>
-            </a:r>
-          </a:p>
-        </p:txBody>
-      </p:sp>
-      <p:sp>
-        <p:nvSpPr>
-          <p:cNvPr id="4" name="Slide Number Placeholder 3"/>
-          <p:cNvSpPr>
-            <a:spLocks noGrp="1"/>
-          </p:cNvSpPr>
-          <p:nvPr>
-            <p:ph type="sldNum" idx="5" sz="quarter"/>
-          </p:nvPr>
-        </p:nvSpPr>
-        <p:spPr/>
-      </p:sp>
-    </p:spTree>
-  </p:cSld>
-  <p:clrMapOvr>
-    <a:masterClrMapping/>
-  </p:clrMapOvr>
-</p:notes>
-</file>
-
-<file path=ppt/notesSlides/notesSlide5.xml><?xml version="1.0" encoding="utf-8"?>
-<p:notes xmlns:a="http://schemas.openxmlformats.org/drawingml/2006/main" xmlns:p="http://schemas.openxmlformats.org/presentationml/2006/main" xmlns:r="http://schemas.openxmlformats.org/officeDocument/2006/relationships">
-  <p:cSld>
-    <p:spTree>
-      <p:nvGrpSpPr>
-        <p:cNvPr id="1" name=""/>
-        <p:cNvGrpSpPr/>
-        <p:nvPr/>
-      </p:nvGrpSpPr>
-      <p:grpSpPr>
-        <a:xfrm>
-          <a:off x="0" y="0"/>
-          <a:ext cx="0" cy="0"/>
-          <a:chOff x="0" y="0"/>
-          <a:chExt cx="0" cy="0"/>
-        </a:xfrm>
-      </p:grpSpPr>
-      <p:sp>
-        <p:nvSpPr>
-          <p:cNvPr id="2" name="Slide Image Placeholder 1"/>
-          <p:cNvSpPr>
-            <a:spLocks noGrp="1"/>
-          </p:cNvSpPr>
-          <p:nvPr>
-            <p:ph type="sldImg" idx="2"/>
-          </p:nvPr>
-        </p:nvSpPr>
-        <p:spPr/>
-      </p:sp>
-      <p:sp>
-        <p:nvSpPr>
-          <p:cNvPr id="3" name="Notes Placeholder 2"/>
-          <p:cNvSpPr>
-            <a:spLocks noGrp="1"/>
-          </p:cNvSpPr>
-          <p:nvPr>
-            <p:ph type="body" idx="3" sz="quarter"/>
-          </p:nvPr>
-        </p:nvSpPr>
-        <p:spPr/>
-        <p:txBody>
-          <a:bodyPr/>
-          <a:lstStyle/>
-          <a:p>
-            <a:r>
-              <a:t>Dejar 2 minutos para que lo escriban. La diapositiva siguiente muestra el resumen.</a:t>
-            </a:r>
-          </a:p>
-        </p:txBody>
-      </p:sp>
-      <p:sp>
-        <p:nvSpPr>
-          <p:cNvPr id="4" name="Slide Number Placeholder 3"/>
-          <p:cNvSpPr>
-            <a:spLocks noGrp="1"/>
-          </p:cNvSpPr>
-          <p:nvPr>
-            <p:ph type="sldNum" idx="5" sz="quarter"/>
-          </p:nvPr>
-        </p:nvSpPr>
-        <p:spPr/>
-      </p:sp>
-    </p:spTree>
-  </p:cSld>
-  <p:clrMapOvr>
-    <a:masterClrMapping/>
-  </p:clrMapOvr>
-</p:notes>
-</file>
-
-<file path=ppt/notesSlides/notesSlide6.xml><?xml version="1.0" encoding="utf-8"?>
-<p:notes xmlns:a="http://schemas.openxmlformats.org/drawingml/2006/main" xmlns:p="http://schemas.openxmlformats.org/presentationml/2006/main" xmlns:r="http://schemas.openxmlformats.org/officeDocument/2006/relationships">
-  <p:cSld>
-    <p:spTree>
-      <p:nvGrpSpPr>
-        <p:cNvPr id="1" name=""/>
-        <p:cNvGrpSpPr/>
-        <p:nvPr/>
-      </p:nvGrpSpPr>
-      <p:grpSpPr>
-        <a:xfrm>
-          <a:off x="0" y="0"/>
-          <a:ext cx="0" cy="0"/>
-          <a:chOff x="0" y="0"/>
-          <a:chExt cx="0" cy="0"/>
-        </a:xfrm>
-      </p:grpSpPr>
-      <p:sp>
-        <p:nvSpPr>
-          <p:cNvPr id="2" name="Slide Image Placeholder 1"/>
-          <p:cNvSpPr>
-            <a:spLocks noGrp="1"/>
-          </p:cNvSpPr>
-          <p:nvPr>
-            <p:ph type="sldImg" idx="2"/>
-          </p:nvPr>
-        </p:nvSpPr>
-        <p:spPr/>
-      </p:sp>
-      <p:sp>
-        <p:nvSpPr>
-          <p:cNvPr id="3" name="Notes Placeholder 2"/>
-          <p:cNvSpPr>
-            <a:spLocks noGrp="1"/>
-          </p:cNvSpPr>
-          <p:nvPr>
-            <p:ph type="body" idx="3" sz="quarter"/>
-          </p:nvPr>
-        </p:nvSpPr>
-        <p:spPr/>
-        <p:txBody>
-          <a:bodyPr/>
-          <a:lstStyle/>
-          <a:p>
-            <a:r>
-              <a:t>Buscar: «sesgos cognitivos explicados» · «pensar rápido, pensar despacio resumen»</a:t>
-            </a:r>
-          </a:p>
-        </p:txBody>
-      </p:sp>
-      <p:sp>
-        <p:nvSpPr>
-          <p:cNvPr id="4" name="Slide Number Placeholder 3"/>
-          <p:cNvSpPr>
-            <a:spLocks noGrp="1"/>
-          </p:cNvSpPr>
-          <p:nvPr>
-            <p:ph type="sldNum" idx="5" sz="quarter"/>
-          </p:nvPr>
-        </p:nvSpPr>
-        <p:spPr/>
-      </p:sp>
-    </p:spTree>
-  </p:cSld>
-  <p:clrMapOvr>
-    <a:masterClrMapping/>
-  </p:clrMapOvr>
-</p:notes>
 </file>
 
 <file path=ppt/slideLayouts/slideLayout1.xml><?xml version="1.0" encoding="utf-8"?>

--- a/curso/pptx/S43.pptx
+++ b/curso/pptx/S43.pptx
@@ -4212,7 +4212,7 @@
                 </a:solidFill>
                 <a:latin typeface="Nunito Sans"/>
               </a:rPr>
-              <a:t>Chen tiene miedo a los tiburones cuando se baña en el mar. En cambio, cruza la calle mirando el móvil sin preocuparse.</a:t>
+              <a:t>Un chico tiene miedo a los tiburones cuando se baña en el mar. En cambio, cruza la calle mirando el móvil sin preocuparse.</a:t>
             </a:r>
           </a:p>
         </p:txBody>
@@ -4539,7 +4539,7 @@
                 </a:solidFill>
                 <a:latin typeface="Nunito Sans"/>
               </a:rPr>
-              <a:t>Omar ve nubes negras sobre Bilbao y coge el paraguas. No ha mirado el tiempo en el móvil ni lo ha pensado despacio.</a:t>
+              <a:t>Un chico ve nubes negras sobre Bilbao y coge el paraguas. No ha mirado el tiempo en el móvil ni lo ha pensado despacio.</a:t>
             </a:r>
           </a:p>
         </p:txBody>

--- a/curso/pptx/S43.pptx
+++ b/curso/pptx/S43.pptx
@@ -20,8 +20,6 @@
     <p:sldId id="268" r:id="rId20"/>
     <p:sldId id="269" r:id="rId21"/>
     <p:sldId id="270" r:id="rId22"/>
-    <p:sldId id="271" r:id="rId23"/>
-    <p:sldId id="272" r:id="rId24"/>
   </p:sldIdLst>
   <p:sldSz cx="12192000" cy="6858000" type="screen4x3"/>
   <p:notesSz cx="6858000" cy="9144000"/>
@@ -3535,7 +3533,7 @@
                 </a:solidFill>
                 <a:latin typeface="Nunito Sans"/>
               </a:rPr>
-              <a:t>PENSAMIENTO CRÍTICO · SESIÓN 43 · UNIDAD 8 · SESGOS: LA MENTE TAMBIÉN ENGAÑA</a:t>
+              <a:t>PENSAMIENTO CRÍTICO · SESIÓN 43 · UNIDAD 7 · EMOCIONES, CONFLICTOS Y DILEMAS</a:t>
             </a:r>
           </a:p>
         </p:txBody>
@@ -3574,7 +3572,7 @@
                 </a:solidFill>
                 <a:latin typeface="Fredoka"/>
               </a:rPr>
-              <a:t>¿Qué es un sesgo cognitivo?</a:t>
+              <a:t>Repaso y examen de la unidad 7</a:t>
             </a:r>
           </a:p>
         </p:txBody>
@@ -3613,7 +3611,7 @@
                 </a:solidFill>
                 <a:latin typeface="Nunito Sans"/>
               </a:rPr>
-              <a:t>Un sesgo cognitivo es un error que se repite de forma predecible. Suele venir de atajos mentales que casi siempre nos ayudan.</a:t>
+              <a:t>Repasamos la unidad: para qué sirven las emociones, cómo afrontar un conflicto, los conflictos en las redes y cómo pensar un dilema ético.</a:t>
             </a:r>
           </a:p>
         </p:txBody>
@@ -3717,7 +3715,7 @@
                 </a:solidFill>
                 <a:latin typeface="Fredoka"/>
               </a:rPr>
-              <a:t>Casos resueltos</a:t>
+              <a:t>Un caso con todo</a:t>
             </a:r>
           </a:p>
         </p:txBody>
@@ -3782,7 +3780,7 @@
                 </a:solidFill>
                 <a:latin typeface="Nunito Sans"/>
               </a:rPr>
-              <a:t>BLOQUE 2 · CASOS RESUELTOS</a:t>
+              <a:t>BLOQUE 2 · UN CASO CON TODO</a:t>
             </a:r>
           </a:p>
         </p:txBody>
@@ -3821,7 +3819,7 @@
                 </a:solidFill>
                 <a:latin typeface="Fredoka"/>
               </a:rPr>
-              <a:t>Caso 1 · El bate y la pelota</a:t>
+              <a:t>El comentario en caliente</a:t>
             </a:r>
           </a:p>
         </p:txBody>
@@ -3903,7 +3901,7 @@
                 </a:solidFill>
                 <a:latin typeface="Nunito Sans"/>
               </a:rPr>
-              <a:t>Un bate y una pelota cuestan 1,10 € en total. El bate cuesta 1 € más que la pelota. ¿Cuánto cuesta la pelota?</a:t>
+              <a:t>Una cuenta muy seguida se burla del equipo de fútbol de una chica. Le da rabia y está a punto de contestar con un insulto, como ya hacen cientos. (Ejemplo inventado.)</a:t>
             </a:r>
           </a:p>
         </p:txBody>
@@ -3951,7 +3949,7 @@
                 </a:solidFill>
                 <a:latin typeface="Nunito Sans"/>
               </a:rPr>
-              <a:t>La respuesta rápida es 10 céntimos. Mucha gente la da, también estudiantes universitarios.</a:t>
+              <a:t>Emoción: rabia. Informa de que algo le importa, pero no manda: mejor esperar antes de escribir.</a:t>
             </a:r>
           </a:p>
           <a:p>
@@ -3976,7 +3974,7 @@
                 </a:solidFill>
                 <a:latin typeface="Nunito Sans"/>
               </a:rPr>
-              <a:t>Compruebo despacio: si la pelota vale 0,10 €, el bate vale 1,10 €. Total: 1,20 €. ¡Falla!</a:t>
+              <a:t>¿Dilema? Defender a su equipo y no hacer daño pueden ir juntos: insultar no es una buena razón.</a:t>
             </a:r>
           </a:p>
           <a:p>
@@ -4001,7 +3999,7 @@
                 </a:solidFill>
                 <a:latin typeface="Nunito Sans"/>
               </a:rPr>
-              <a:t>Si la pelota vale 0,05 €, el bate vale 1,05 €. Total: 1,10 €. Correcto.</a:t>
+              <a:t>Redes: el comentario queda guardado y lo ve mucha gente. Sumarse a una ola de insultos también es responsabilidad suya.</a:t>
             </a:r>
           </a:p>
           <a:p>
@@ -4026,7 +4024,7 @@
                 </a:solidFill>
                 <a:latin typeface="Nunito Sans"/>
               </a:rPr>
-              <a:t>Conclusión: el atajo da una respuesta que «suena» bien. Pensar despacio la corrige.</a:t>
+              <a:t>Conclusión: no insulta. Si quiere responder, que sea en frío y con razones.</a:t>
             </a:r>
           </a:p>
         </p:txBody>
@@ -4040,6 +4038,340 @@
 </file>
 
 <file path=ppt/slides/slide12.xml><?xml version="1.0" encoding="utf-8"?>
+<p:sld xmlns:a="http://schemas.openxmlformats.org/drawingml/2006/main" xmlns:p="http://schemas.openxmlformats.org/presentationml/2006/main" xmlns:r="http://schemas.openxmlformats.org/officeDocument/2006/relationships">
+  <p:cSld>
+    <p:bg>
+      <p:bgPr>
+        <a:solidFill>
+          <a:srgbClr val="F6C9A8"/>
+        </a:solidFill>
+        <a:effectLst/>
+      </p:bgPr>
+    </p:bg>
+    <p:spTree>
+      <p:nvGrpSpPr>
+        <p:cNvPr id="1" name=""/>
+        <p:cNvGrpSpPr/>
+        <p:nvPr/>
+      </p:nvGrpSpPr>
+      <p:grpSpPr/>
+      <p:sp>
+        <p:nvSpPr>
+          <p:cNvPr id="2" name="TextBox 1"/>
+          <p:cNvSpPr txBox="1"/>
+          <p:nvPr/>
+        </p:nvSpPr>
+        <p:spPr>
+          <a:xfrm>
+            <a:off x="640000" y="380000"/>
+            <a:ext cx="10912000" cy="420000"/>
+          </a:xfrm>
+          <a:prstGeom prst="rect">
+            <a:avLst/>
+          </a:prstGeom>
+          <a:noFill/>
+        </p:spPr>
+        <p:txBody>
+          <a:bodyPr wrap="square">
+            <a:spAutoFit/>
+          </a:bodyPr>
+          <a:lstStyle/>
+          <a:p>
+            <a:pPr>
+              <a:spcAft>
+                <a:spcPts val="630"/>
+              </a:spcAft>
+            </a:pPr>
+            <a:r>
+              <a:rPr sz="1400" b="1">
+                <a:solidFill>
+                  <a:srgbClr val="1F2A44"/>
+                </a:solidFill>
+                <a:latin typeface="Nunito Sans"/>
+              </a:rPr>
+              <a:t>CASO TRAMPA · BLOQUE 2 · UN CASO CON TODO</a:t>
+            </a:r>
+          </a:p>
+        </p:txBody>
+      </p:sp>
+      <p:sp>
+        <p:nvSpPr>
+          <p:cNvPr id="3" name="TextBox 2"/>
+          <p:cNvSpPr txBox="1"/>
+          <p:nvPr/>
+        </p:nvSpPr>
+        <p:spPr>
+          <a:xfrm>
+            <a:off x="640000" y="760000"/>
+            <a:ext cx="10912000" cy="800000"/>
+          </a:xfrm>
+          <a:prstGeom prst="rect">
+            <a:avLst/>
+          </a:prstGeom>
+          <a:noFill/>
+        </p:spPr>
+        <p:txBody>
+          <a:bodyPr wrap="square">
+            <a:spAutoFit/>
+          </a:bodyPr>
+          <a:lstStyle/>
+          <a:p>
+            <a:pPr>
+              <a:spcAft>
+                <a:spcPts val="1710"/>
+              </a:spcAft>
+            </a:pPr>
+            <a:r>
+              <a:rPr sz="3800" b="1">
+                <a:solidFill>
+                  <a:srgbClr val="1F2A44"/>
+                </a:solidFill>
+                <a:latin typeface="Fredoka"/>
+              </a:rPr>
+              <a:t>⚠ Colaborar siempre</a:t>
+            </a:r>
+          </a:p>
+        </p:txBody>
+      </p:sp>
+      <p:sp>
+        <p:nvSpPr>
+          <p:cNvPr id="4" name="Rectangle 3"/>
+          <p:cNvSpPr/>
+          <p:nvPr/>
+        </p:nvSpPr>
+        <p:spPr>
+          <a:xfrm>
+            <a:off x="640000" y="1600000"/>
+            <a:ext cx="10912000" cy="1100000"/>
+          </a:xfrm>
+          <a:prstGeom prst="rect">
+            <a:avLst/>
+          </a:prstGeom>
+          <a:solidFill>
+            <a:srgbClr val="FBF7EF"/>
+          </a:solidFill>
+          <a:ln>
+            <a:noFill/>
+          </a:ln>
+        </p:spPr>
+        <p:style>
+          <a:lnRef idx="1">
+            <a:schemeClr val="accent1"/>
+          </a:lnRef>
+          <a:fillRef idx="3">
+            <a:schemeClr val="accent1"/>
+          </a:fillRef>
+          <a:effectRef idx="2">
+            <a:schemeClr val="accent1"/>
+          </a:effectRef>
+          <a:fontRef idx="minor">
+            <a:schemeClr val="lt1"/>
+          </a:fontRef>
+        </p:style>
+        <p:txBody>
+          <a:bodyPr rtlCol="0" anchor="ctr"/>
+          <a:lstStyle/>
+          <a:p>
+            <a:pPr algn="ctr"/>
+          </a:p>
+        </p:txBody>
+      </p:sp>
+      <p:sp>
+        <p:nvSpPr>
+          <p:cNvPr id="5" name="TextBox 4"/>
+          <p:cNvSpPr txBox="1"/>
+          <p:nvPr/>
+        </p:nvSpPr>
+        <p:spPr>
+          <a:xfrm>
+            <a:off x="840000" y="1650000"/>
+            <a:ext cx="10512000" cy="1000000"/>
+          </a:xfrm>
+          <a:prstGeom prst="rect">
+            <a:avLst/>
+          </a:prstGeom>
+          <a:noFill/>
+        </p:spPr>
+        <p:txBody>
+          <a:bodyPr wrap="square" anchor="ctr">
+            <a:spAutoFit/>
+          </a:bodyPr>
+          <a:lstStyle/>
+          <a:p>
+            <a:pPr>
+              <a:spcAft>
+                <a:spcPts val="1170"/>
+              </a:spcAft>
+            </a:pPr>
+            <a:r>
+              <a:rPr sz="2600" b="1">
+                <a:solidFill>
+                  <a:srgbClr val="1F2A44"/>
+                </a:solidFill>
+                <a:latin typeface="Nunito Sans"/>
+              </a:rPr>
+              <a:t>Un chico dice: «Ante cualquier conflicto, lo mejor es colaborar. Las otras actitudes siempre son peores».</a:t>
+            </a:r>
+          </a:p>
+        </p:txBody>
+      </p:sp>
+      <p:sp>
+        <p:nvSpPr>
+          <p:cNvPr id="6" name="TextBox 5"/>
+          <p:cNvSpPr txBox="1"/>
+          <p:nvPr/>
+        </p:nvSpPr>
+        <p:spPr>
+          <a:xfrm>
+            <a:off x="640000" y="2900000"/>
+            <a:ext cx="10912000" cy="3500000"/>
+          </a:xfrm>
+          <a:prstGeom prst="rect">
+            <a:avLst/>
+          </a:prstGeom>
+          <a:noFill/>
+        </p:spPr>
+        <p:txBody>
+          <a:bodyPr wrap="square">
+            <a:spAutoFit/>
+          </a:bodyPr>
+          <a:lstStyle/>
+          <a:p>
+            <a:pPr>
+              <a:spcAft>
+                <a:spcPts val="1080"/>
+              </a:spcAft>
+            </a:pPr>
+            <a:r>
+              <a:rPr sz="2400" b="1">
+                <a:solidFill>
+                  <a:srgbClr val="E8793A"/>
+                </a:solidFill>
+                <a:latin typeface="Nunito Sans"/>
+              </a:rPr>
+              <a:t>1. </a:t>
+            </a:r>
+            <a:r>
+              <a:rPr sz="2400" b="0">
+                <a:solidFill>
+                  <a:srgbClr val="1F2A44"/>
+                </a:solidFill>
+                <a:latin typeface="Nunito Sans"/>
+              </a:rPr>
+              <a:t>Colaborar suena a lo mejor… ¿vale siempre?</a:t>
+            </a:r>
+          </a:p>
+          <a:p>
+            <a:pPr>
+              <a:spcAft>
+                <a:spcPts val="1080"/>
+              </a:spcAft>
+            </a:pPr>
+            <a:r>
+              <a:rPr sz="2400" b="1">
+                <a:solidFill>
+                  <a:srgbClr val="E8793A"/>
+                </a:solidFill>
+                <a:latin typeface="Nunito Sans"/>
+              </a:rPr>
+              <a:t>2. </a:t>
+            </a:r>
+            <a:r>
+              <a:rPr sz="2400" b="0">
+                <a:solidFill>
+                  <a:srgbClr val="1F2A44"/>
+                </a:solidFill>
+                <a:latin typeface="Nunito Sans"/>
+              </a:rPr>
+              <a:t>Parece que sí: colaborar busca una salida buena para los dos.</a:t>
+            </a:r>
+          </a:p>
+          <a:p>
+            <a:pPr>
+              <a:spcAft>
+                <a:spcPts val="1080"/>
+              </a:spcAft>
+            </a:pPr>
+            <a:r>
+              <a:rPr sz="2400" b="1">
+                <a:solidFill>
+                  <a:srgbClr val="E8793A"/>
+                </a:solidFill>
+                <a:latin typeface="Nunito Sans"/>
+              </a:rPr>
+              <a:t>3. </a:t>
+            </a:r>
+            <a:r>
+              <a:rPr sz="2400" b="0">
+                <a:solidFill>
+                  <a:srgbClr val="1F2A44"/>
+                </a:solidFill>
+                <a:latin typeface="Nunito Sans"/>
+              </a:rPr>
+              <a:t>Pero colaborar lleva tiempo y ganas por las dos partes.</a:t>
+            </a:r>
+          </a:p>
+          <a:p>
+            <a:pPr>
+              <a:spcAft>
+                <a:spcPts val="1080"/>
+              </a:spcAft>
+            </a:pPr>
+            <a:r>
+              <a:rPr sz="2400" b="1">
+                <a:solidFill>
+                  <a:srgbClr val="E8793A"/>
+                </a:solidFill>
+                <a:latin typeface="Nunito Sans"/>
+              </a:rPr>
+              <a:t>4. </a:t>
+            </a:r>
+            <a:r>
+              <a:rPr sz="2400" b="0">
+                <a:solidFill>
+                  <a:srgbClr val="1F2A44"/>
+                </a:solidFill>
+                <a:latin typeface="Nunito Sans"/>
+              </a:rPr>
+              <a:t>Si importa poco, ceder o pactar puede ir mejor. Ante el acoso no se colabora: se pide ayuda.</a:t>
+            </a:r>
+          </a:p>
+          <a:p>
+            <a:pPr>
+              <a:spcAft>
+                <a:spcPts val="1080"/>
+              </a:spcAft>
+            </a:pPr>
+            <a:r>
+              <a:rPr sz="2400" b="1">
+                <a:solidFill>
+                  <a:srgbClr val="E8793A"/>
+                </a:solidFill>
+                <a:latin typeface="Nunito Sans"/>
+              </a:rPr>
+              <a:t>5. </a:t>
+            </a:r>
+            <a:r>
+              <a:rPr sz="2400" b="0">
+                <a:solidFill>
+                  <a:srgbClr val="1F2A44"/>
+                </a:solidFill>
+                <a:latin typeface="Nunito Sans"/>
+              </a:rPr>
+              <a:t>Conclusión: ninguna actitud vale siempre. Depende de cuánto le importa a cada uno y de si hay respeto.</a:t>
+            </a:r>
+          </a:p>
+        </p:txBody>
+      </p:sp>
+    </p:spTree>
+  </p:cSld>
+  <p:clrMapOvr>
+    <a:masterClrMapping/>
+  </p:clrMapOvr>
+</p:sld>
+</file>
+
+<file path=ppt/slides/slide13.xml><?xml version="1.0" encoding="utf-8"?>
 <p:sld xmlns:a="http://schemas.openxmlformats.org/drawingml/2006/main" xmlns:p="http://schemas.openxmlformats.org/presentationml/2006/main" xmlns:r="http://schemas.openxmlformats.org/officeDocument/2006/relationships">
   <p:cSld>
     <p:bg>
@@ -4091,7 +4423,7 @@
                 </a:solidFill>
                 <a:latin typeface="Nunito Sans"/>
               </a:rPr>
-              <a:t>BLOQUE 2 · CASOS RESUELTOS</a:t>
+              <a:t>LO DE HOY EN TRES LÍNEAS</a:t>
             </a:r>
           </a:p>
         </p:txBody>
@@ -4130,64 +4462,21 @@
                 </a:solidFill>
                 <a:latin typeface="Fredoka"/>
               </a:rPr>
-              <a:t>Caso 2 · ¿Qué es más peligroso?</a:t>
-            </a:r>
-          </a:p>
-        </p:txBody>
-      </p:sp>
-      <p:sp>
-        <p:nvSpPr>
-          <p:cNvPr id="4" name="Rectangle 3"/>
-          <p:cNvSpPr/>
-          <p:nvPr/>
-        </p:nvSpPr>
-        <p:spPr>
-          <a:xfrm>
-            <a:off x="640000" y="1600000"/>
-            <a:ext cx="10912000" cy="1100000"/>
-          </a:xfrm>
-          <a:prstGeom prst="rect">
-            <a:avLst/>
-          </a:prstGeom>
-          <a:solidFill>
-            <a:srgbClr val="FFFFFF"/>
-          </a:solidFill>
-          <a:ln>
-            <a:noFill/>
-          </a:ln>
-        </p:spPr>
-        <p:style>
-          <a:lnRef idx="1">
-            <a:schemeClr val="accent1"/>
-          </a:lnRef>
-          <a:fillRef idx="3">
-            <a:schemeClr val="accent1"/>
-          </a:fillRef>
-          <a:effectRef idx="2">
-            <a:schemeClr val="accent1"/>
-          </a:effectRef>
-          <a:fontRef idx="minor">
-            <a:schemeClr val="lt1"/>
-          </a:fontRef>
-        </p:style>
-        <p:txBody>
-          <a:bodyPr rtlCol="0" anchor="ctr"/>
-          <a:lstStyle/>
-          <a:p>
-            <a:pPr algn="ctr"/>
-          </a:p>
-        </p:txBody>
-      </p:sp>
-      <p:sp>
-        <p:nvSpPr>
-          <p:cNvPr id="5" name="TextBox 4"/>
+              <a:t>Escríbelo tú primero, sin mirar</a:t>
+            </a:r>
+          </a:p>
+        </p:txBody>
+      </p:sp>
+      <p:sp>
+        <p:nvSpPr>
+          <p:cNvPr id="4" name="TextBox 3"/>
           <p:cNvSpPr txBox="1"/>
           <p:nvPr/>
         </p:nvSpPr>
         <p:spPr>
           <a:xfrm>
-            <a:off x="840000" y="1650000"/>
-            <a:ext cx="10512000" cy="1000000"/>
+            <a:off x="640000" y="1800000"/>
+            <a:ext cx="10912000" cy="1500000"/>
           </a:xfrm>
           <a:prstGeom prst="rect">
             <a:avLst/>
@@ -4195,7 +4484,7 @@
           <a:noFill/>
         </p:spPr>
         <p:txBody>
-          <a:bodyPr wrap="square" anchor="ctr">
+          <a:bodyPr wrap="square">
             <a:spAutoFit/>
           </a:bodyPr>
           <a:lstStyle/>
@@ -4206,488 +4495,13 @@
               </a:spcAft>
             </a:pPr>
             <a:r>
-              <a:rPr sz="2600" b="1">
-                <a:solidFill>
-                  <a:srgbClr val="1F2A44"/>
-                </a:solidFill>
-                <a:latin typeface="Nunito Sans"/>
-              </a:rPr>
-              <a:t>Un chico tiene miedo a los tiburones cuando se baña en el mar. En cambio, cruza la calle mirando el móvil sin preocuparse.</a:t>
-            </a:r>
-          </a:p>
-        </p:txBody>
-      </p:sp>
-      <p:sp>
-        <p:nvSpPr>
-          <p:cNvPr id="6" name="TextBox 5"/>
-          <p:cNvSpPr txBox="1"/>
-          <p:nvPr/>
-        </p:nvSpPr>
-        <p:spPr>
-          <a:xfrm>
-            <a:off x="640000" y="2900000"/>
-            <a:ext cx="10912000" cy="3500000"/>
-          </a:xfrm>
-          <a:prstGeom prst="rect">
-            <a:avLst/>
-          </a:prstGeom>
-          <a:noFill/>
-        </p:spPr>
-        <p:txBody>
-          <a:bodyPr wrap="square">
-            <a:spAutoFit/>
-          </a:bodyPr>
-          <a:lstStyle/>
-          <a:p>
-            <a:pPr>
-              <a:spcAft>
-                <a:spcPts val="1080"/>
-              </a:spcAft>
-            </a:pPr>
-            <a:r>
-              <a:rPr sz="2400" b="1">
-                <a:solidFill>
-                  <a:srgbClr val="E8793A"/>
-                </a:solidFill>
-                <a:latin typeface="Nunito Sans"/>
-              </a:rPr>
-              <a:t>1. </a:t>
-            </a:r>
-            <a:r>
-              <a:rPr sz="2400" b="0">
-                <a:solidFill>
-                  <a:srgbClr val="1F2A44"/>
-                </a:solidFill>
-                <a:latin typeface="Nunito Sans"/>
-              </a:rPr>
-              <a:t>Los ataques de tiburón salen mucho en películas y noticias: los recordamos fácil.</a:t>
-            </a:r>
-          </a:p>
-          <a:p>
-            <a:pPr>
-              <a:spcAft>
-                <a:spcPts val="1080"/>
-              </a:spcAft>
-            </a:pPr>
-            <a:r>
-              <a:rPr sz="2400" b="1">
-                <a:solidFill>
-                  <a:srgbClr val="E8793A"/>
-                </a:solidFill>
-                <a:latin typeface="Nunito Sans"/>
-              </a:rPr>
-              <a:t>2. </a:t>
-            </a:r>
-            <a:r>
-              <a:rPr sz="2400" b="0">
-                <a:solidFill>
-                  <a:srgbClr val="1F2A44"/>
-                </a:solidFill>
-                <a:latin typeface="Nunito Sans"/>
-              </a:rPr>
-              <a:t>Los atropellos son muchísimo más frecuentes, pero casi no llaman la atención.</a:t>
-            </a:r>
-          </a:p>
-          <a:p>
-            <a:pPr>
-              <a:spcAft>
-                <a:spcPts val="1080"/>
-              </a:spcAft>
-            </a:pPr>
-            <a:r>
-              <a:rPr sz="2400" b="1">
-                <a:solidFill>
-                  <a:srgbClr val="E8793A"/>
-                </a:solidFill>
-                <a:latin typeface="Nunito Sans"/>
-              </a:rPr>
-              <a:t>3. </a:t>
-            </a:r>
-            <a:r>
-              <a:rPr sz="2400" b="0">
-                <a:solidFill>
-                  <a:srgbClr val="1F2A44"/>
-                </a:solidFill>
-                <a:latin typeface="Nunito Sans"/>
-              </a:rPr>
-              <a:t>Atajo: «si lo recuerdo fácil, pasa mucho». Aquí falla.</a:t>
-            </a:r>
-          </a:p>
-          <a:p>
-            <a:pPr>
-              <a:spcAft>
-                <a:spcPts val="1080"/>
-              </a:spcAft>
-            </a:pPr>
-            <a:r>
-              <a:rPr sz="2400" b="1">
-                <a:solidFill>
-                  <a:srgbClr val="E8793A"/>
-                </a:solidFill>
-                <a:latin typeface="Nunito Sans"/>
-              </a:rPr>
-              <a:t>4. </a:t>
-            </a:r>
-            <a:r>
-              <a:rPr sz="2400" b="0">
-                <a:solidFill>
-                  <a:srgbClr val="1F2A44"/>
-                </a:solidFill>
-                <a:latin typeface="Nunito Sans"/>
-              </a:rPr>
-              <a:t>Conclusión: </a:t>
-            </a:r>
-            <a:r>
-              <a:rPr sz="2400" b="1">
-                <a:solidFill>
-                  <a:srgbClr val="1F2A44"/>
-                </a:solidFill>
-                <a:latin typeface="Nunito Sans"/>
-              </a:rPr>
-              <a:t>sesgo de disponibilidad</a:t>
-            </a:r>
-            <a:r>
-              <a:rPr sz="2400" b="0">
-                <a:solidFill>
-                  <a:srgbClr val="1F2A44"/>
-                </a:solidFill>
-                <a:latin typeface="Nunito Sans"/>
-              </a:rPr>
-              <a:t>. La mente juzga el peligro por lo que recuerda fácil, no por los datos.</a:t>
-            </a:r>
-          </a:p>
-        </p:txBody>
-      </p:sp>
-    </p:spTree>
-  </p:cSld>
-  <p:clrMapOvr>
-    <a:masterClrMapping/>
-  </p:clrMapOvr>
-</p:sld>
-</file>
-
-<file path=ppt/slides/slide13.xml><?xml version="1.0" encoding="utf-8"?>
-<p:sld xmlns:a="http://schemas.openxmlformats.org/drawingml/2006/main" xmlns:p="http://schemas.openxmlformats.org/presentationml/2006/main" xmlns:r="http://schemas.openxmlformats.org/officeDocument/2006/relationships">
-  <p:cSld>
-    <p:bg>
-      <p:bgPr>
-        <a:solidFill>
-          <a:srgbClr val="F6C9A8"/>
-        </a:solidFill>
-        <a:effectLst/>
-      </p:bgPr>
-    </p:bg>
-    <p:spTree>
-      <p:nvGrpSpPr>
-        <p:cNvPr id="1" name=""/>
-        <p:cNvGrpSpPr/>
-        <p:nvPr/>
-      </p:nvGrpSpPr>
-      <p:grpSpPr/>
-      <p:sp>
-        <p:nvSpPr>
-          <p:cNvPr id="2" name="TextBox 1"/>
-          <p:cNvSpPr txBox="1"/>
-          <p:nvPr/>
-        </p:nvSpPr>
-        <p:spPr>
-          <a:xfrm>
-            <a:off x="640000" y="380000"/>
-            <a:ext cx="10912000" cy="420000"/>
-          </a:xfrm>
-          <a:prstGeom prst="rect">
-            <a:avLst/>
-          </a:prstGeom>
-          <a:noFill/>
-        </p:spPr>
-        <p:txBody>
-          <a:bodyPr wrap="square">
-            <a:spAutoFit/>
-          </a:bodyPr>
-          <a:lstStyle/>
-          <a:p>
-            <a:pPr>
-              <a:spcAft>
-                <a:spcPts val="630"/>
-              </a:spcAft>
-            </a:pPr>
-            <a:r>
-              <a:rPr sz="1400" b="1">
-                <a:solidFill>
-                  <a:srgbClr val="1F2A44"/>
-                </a:solidFill>
-                <a:latin typeface="Nunito Sans"/>
-              </a:rPr>
-              <a:t>CASO TRAMPA · BLOQUE 2 · CASOS RESUELTOS</a:t>
-            </a:r>
-          </a:p>
-        </p:txBody>
-      </p:sp>
-      <p:sp>
-        <p:nvSpPr>
-          <p:cNvPr id="3" name="TextBox 2"/>
-          <p:cNvSpPr txBox="1"/>
-          <p:nvPr/>
-        </p:nvSpPr>
-        <p:spPr>
-          <a:xfrm>
-            <a:off x="640000" y="760000"/>
-            <a:ext cx="10912000" cy="800000"/>
-          </a:xfrm>
-          <a:prstGeom prst="rect">
-            <a:avLst/>
-          </a:prstGeom>
-          <a:noFill/>
-        </p:spPr>
-        <p:txBody>
-          <a:bodyPr wrap="square">
-            <a:spAutoFit/>
-          </a:bodyPr>
-          <a:lstStyle/>
-          <a:p>
-            <a:pPr>
-              <a:spcAft>
-                <a:spcPts val="1710"/>
-              </a:spcAft>
-            </a:pPr>
-            <a:r>
-              <a:rPr sz="3800" b="1">
-                <a:solidFill>
-                  <a:srgbClr val="1F2A44"/>
-                </a:solidFill>
-                <a:latin typeface="Fredoka"/>
-              </a:rPr>
-              <a:t>⚠ ¿Atajo = sesgo?</a:t>
-            </a:r>
-          </a:p>
-        </p:txBody>
-      </p:sp>
-      <p:sp>
-        <p:nvSpPr>
-          <p:cNvPr id="4" name="Rectangle 3"/>
-          <p:cNvSpPr/>
-          <p:nvPr/>
-        </p:nvSpPr>
-        <p:spPr>
-          <a:xfrm>
-            <a:off x="640000" y="1600000"/>
-            <a:ext cx="10912000" cy="1100000"/>
-          </a:xfrm>
-          <a:prstGeom prst="rect">
-            <a:avLst/>
-          </a:prstGeom>
-          <a:solidFill>
-            <a:srgbClr val="FBF7EF"/>
-          </a:solidFill>
-          <a:ln>
-            <a:noFill/>
-          </a:ln>
-        </p:spPr>
-        <p:style>
-          <a:lnRef idx="1">
-            <a:schemeClr val="accent1"/>
-          </a:lnRef>
-          <a:fillRef idx="3">
-            <a:schemeClr val="accent1"/>
-          </a:fillRef>
-          <a:effectRef idx="2">
-            <a:schemeClr val="accent1"/>
-          </a:effectRef>
-          <a:fontRef idx="minor">
-            <a:schemeClr val="lt1"/>
-          </a:fontRef>
-        </p:style>
-        <p:txBody>
-          <a:bodyPr rtlCol="0" anchor="ctr"/>
-          <a:lstStyle/>
-          <a:p>
-            <a:pPr algn="ctr"/>
-          </a:p>
-        </p:txBody>
-      </p:sp>
-      <p:sp>
-        <p:nvSpPr>
-          <p:cNvPr id="5" name="TextBox 4"/>
-          <p:cNvSpPr txBox="1"/>
-          <p:nvPr/>
-        </p:nvSpPr>
-        <p:spPr>
-          <a:xfrm>
-            <a:off x="840000" y="1650000"/>
-            <a:ext cx="10512000" cy="1000000"/>
-          </a:xfrm>
-          <a:prstGeom prst="rect">
-            <a:avLst/>
-          </a:prstGeom>
-          <a:noFill/>
-        </p:spPr>
-        <p:txBody>
-          <a:bodyPr wrap="square" anchor="ctr">
-            <a:spAutoFit/>
-          </a:bodyPr>
-          <a:lstStyle/>
-          <a:p>
-            <a:pPr>
-              <a:spcAft>
-                <a:spcPts val="1170"/>
-              </a:spcAft>
-            </a:pPr>
-            <a:r>
-              <a:rPr sz="2600" b="1">
-                <a:solidFill>
-                  <a:srgbClr val="1F2A44"/>
-                </a:solidFill>
-                <a:latin typeface="Nunito Sans"/>
-              </a:rPr>
-              <a:t>Un chico ve nubes negras sobre Bilbao y coge el paraguas. No ha mirado el tiempo en el móvil ni lo ha pensado despacio.</a:t>
-            </a:r>
-          </a:p>
-        </p:txBody>
-      </p:sp>
-      <p:sp>
-        <p:nvSpPr>
-          <p:cNvPr id="6" name="TextBox 5"/>
-          <p:cNvSpPr txBox="1"/>
-          <p:nvPr/>
-        </p:nvSpPr>
-        <p:spPr>
-          <a:xfrm>
-            <a:off x="640000" y="2900000"/>
-            <a:ext cx="10912000" cy="3500000"/>
-          </a:xfrm>
-          <a:prstGeom prst="rect">
-            <a:avLst/>
-          </a:prstGeom>
-          <a:noFill/>
-        </p:spPr>
-        <p:txBody>
-          <a:bodyPr wrap="square">
-            <a:spAutoFit/>
-          </a:bodyPr>
-          <a:lstStyle/>
-          <a:p>
-            <a:pPr>
-              <a:spcAft>
-                <a:spcPts val="1080"/>
-              </a:spcAft>
-            </a:pPr>
-            <a:r>
-              <a:rPr sz="2400" b="1">
-                <a:solidFill>
-                  <a:srgbClr val="E8793A"/>
-                </a:solidFill>
-                <a:latin typeface="Nunito Sans"/>
-              </a:rPr>
-              <a:t>1. </a:t>
-            </a:r>
-            <a:r>
-              <a:rPr sz="2400" b="0">
-                <a:solidFill>
-                  <a:srgbClr val="1F2A44"/>
-                </a:solidFill>
-                <a:latin typeface="Nunito Sans"/>
-              </a:rPr>
-              <a:t>Ha decidido rápido, con un atajo… ¿ha caído en un sesgo?</a:t>
-            </a:r>
-          </a:p>
-          <a:p>
-            <a:pPr>
-              <a:spcAft>
-                <a:spcPts val="1080"/>
-              </a:spcAft>
-            </a:pPr>
-            <a:r>
-              <a:rPr sz="2400" b="1">
-                <a:solidFill>
-                  <a:srgbClr val="E8793A"/>
-                </a:solidFill>
-                <a:latin typeface="Nunito Sans"/>
-              </a:rPr>
-              <a:t>2. </a:t>
-            </a:r>
-            <a:r>
-              <a:rPr sz="2400" b="0">
-                <a:solidFill>
-                  <a:srgbClr val="1F2A44"/>
-                </a:solidFill>
-                <a:latin typeface="Nunito Sans"/>
-              </a:rPr>
-              <a:t>Parece que sí: usó un atajo, «nubes negras = lluvia», sin pensar despacio.</a:t>
-            </a:r>
-          </a:p>
-          <a:p>
-            <a:pPr>
-              <a:spcAft>
-                <a:spcPts val="1080"/>
-              </a:spcAft>
-            </a:pPr>
-            <a:r>
-              <a:rPr sz="2400" b="1">
-                <a:solidFill>
-                  <a:srgbClr val="E8793A"/>
-                </a:solidFill>
-                <a:latin typeface="Nunito Sans"/>
-              </a:rPr>
-              <a:t>3. </a:t>
-            </a:r>
-            <a:r>
-              <a:rPr sz="2400" b="0">
-                <a:solidFill>
-                  <a:srgbClr val="1F2A44"/>
-                </a:solidFill>
-                <a:latin typeface="Nunito Sans"/>
-              </a:rPr>
-              <a:t>Pero ese atajo casi siempre acierta, y le ahorra tiempo.</a:t>
-            </a:r>
-          </a:p>
-          <a:p>
-            <a:pPr>
-              <a:spcAft>
-                <a:spcPts val="1080"/>
-              </a:spcAft>
-            </a:pPr>
-            <a:r>
-              <a:rPr sz="2400" b="1">
-                <a:solidFill>
-                  <a:srgbClr val="E8793A"/>
-                </a:solidFill>
-                <a:latin typeface="Nunito Sans"/>
-              </a:rPr>
-              <a:t>4. </a:t>
-            </a:r>
-            <a:r>
-              <a:rPr sz="2400" b="0">
-                <a:solidFill>
-                  <a:srgbClr val="1F2A44"/>
-                </a:solidFill>
-                <a:latin typeface="Nunito Sans"/>
-              </a:rPr>
-              <a:t>Un sesgo no es cualquier atajo: es un atajo que falla, y siempre hacia el mismo lado.</a:t>
-            </a:r>
-          </a:p>
-          <a:p>
-            <a:pPr>
-              <a:spcAft>
-                <a:spcPts val="1080"/>
-              </a:spcAft>
-            </a:pPr>
-            <a:r>
-              <a:rPr sz="2400" b="1">
-                <a:solidFill>
-                  <a:srgbClr val="E8793A"/>
-                </a:solidFill>
-                <a:latin typeface="Nunito Sans"/>
-              </a:rPr>
-              <a:t>5. </a:t>
-            </a:r>
-            <a:r>
-              <a:rPr sz="2400" b="0">
-                <a:solidFill>
-                  <a:srgbClr val="1F2A44"/>
-                </a:solidFill>
-                <a:latin typeface="Nunito Sans"/>
-              </a:rPr>
-              <a:t>Conclusión: decidir rápido no es un error. Los atajos son útiles; el problema es cuando fallan de forma predecible.</a:t>
+              <a:rPr sz="2600" b="0">
+                <a:solidFill>
+                  <a:srgbClr val="4A5568"/>
+                </a:solidFill>
+                <a:latin typeface="Nunito Sans"/>
+              </a:rPr>
+              <a:t>Dos minutos. Después lo comparamos.</a:t>
             </a:r>
           </a:p>
         </p:txBody>
@@ -4765,8 +4579,8 @@
         </p:nvSpPr>
         <p:spPr>
           <a:xfrm>
-            <a:off x="640000" y="760000"/>
-            <a:ext cx="10912000" cy="800000"/>
+            <a:off x="640000" y="1300000"/>
+            <a:ext cx="10912000" cy="4800000"/>
           </a:xfrm>
           <a:prstGeom prst="rect">
             <a:avLst/>
@@ -4781,56 +4595,76 @@
           <a:p>
             <a:pPr>
               <a:spcAft>
-                <a:spcPts val="1710"/>
+                <a:spcPts val="1350"/>
               </a:spcAft>
             </a:pPr>
             <a:r>
-              <a:rPr sz="3800" b="1">
+              <a:rPr sz="3000" b="1">
+                <a:solidFill>
+                  <a:srgbClr val="E8793A"/>
+                </a:solidFill>
+                <a:latin typeface="Nunito Sans"/>
+              </a:rPr>
+              <a:t>1. </a:t>
+            </a:r>
+            <a:r>
+              <a:rPr sz="3000" b="0">
                 <a:solidFill>
                   <a:srgbClr val="1F2A44"/>
                 </a:solidFill>
-                <a:latin typeface="Fredoka"/>
-              </a:rPr>
-              <a:t>Escríbelo tú primero, sin mirar</a:t>
-            </a:r>
-          </a:p>
-        </p:txBody>
-      </p:sp>
-      <p:sp>
-        <p:nvSpPr>
-          <p:cNvPr id="4" name="TextBox 3"/>
-          <p:cNvSpPr txBox="1"/>
-          <p:nvPr/>
-        </p:nvSpPr>
-        <p:spPr>
-          <a:xfrm>
-            <a:off x="640000" y="1800000"/>
-            <a:ext cx="10912000" cy="1500000"/>
-          </a:xfrm>
-          <a:prstGeom prst="rect">
-            <a:avLst/>
-          </a:prstGeom>
-          <a:noFill/>
-        </p:spPr>
-        <p:txBody>
-          <a:bodyPr wrap="square">
-            <a:spAutoFit/>
-          </a:bodyPr>
-          <a:lstStyle/>
+                <a:latin typeface="Nunito Sans"/>
+              </a:rPr>
+              <a:t>Las emociones informan, pero no mandan: en caliente, mejor esperar.</a:t>
+            </a:r>
+          </a:p>
           <a:p>
             <a:pPr>
               <a:spcAft>
-                <a:spcPts val="1170"/>
+                <a:spcPts val="1350"/>
               </a:spcAft>
             </a:pPr>
             <a:r>
-              <a:rPr sz="2600" b="0">
-                <a:solidFill>
-                  <a:srgbClr val="4A5568"/>
-                </a:solidFill>
-                <a:latin typeface="Nunito Sans"/>
-              </a:rPr>
-              <a:t>Dos minutos. Después lo comparamos.</a:t>
+              <a:rPr sz="3000" b="1">
+                <a:solidFill>
+                  <a:srgbClr val="E8793A"/>
+                </a:solidFill>
+                <a:latin typeface="Nunito Sans"/>
+              </a:rPr>
+              <a:t>2. </a:t>
+            </a:r>
+            <a:r>
+              <a:rPr sz="3000" b="0">
+                <a:solidFill>
+                  <a:srgbClr val="1F2A44"/>
+                </a:solidFill>
+                <a:latin typeface="Nunito Sans"/>
+              </a:rPr>
+              <a:t>Un conflicto es un choque de intereses; ayuda separar lo que pido de lo que necesito.</a:t>
+            </a:r>
+          </a:p>
+          <a:p>
+            <a:pPr>
+              <a:spcAft>
+                <a:spcPts val="1350"/>
+              </a:spcAft>
+            </a:pPr>
+            <a:r>
+              <a:rPr sz="3000" b="1">
+                <a:solidFill>
+                  <a:srgbClr val="E8793A"/>
+                </a:solidFill>
+                <a:latin typeface="Nunito Sans"/>
+              </a:rPr>
+              <a:t>3. </a:t>
+            </a:r>
+            <a:r>
+              <a:rPr sz="3000" b="0">
+                <a:solidFill>
+                  <a:srgbClr val="1F2A44"/>
+                </a:solidFill>
+                <a:latin typeface="Nunito Sans"/>
+              </a:rPr>
+              <a:t>En un dilema chocan dos valores: se piensa con valores, salidas, consecuencias y «¿y si todos?».</a:t>
             </a:r>
           </a:p>
         </p:txBody>
@@ -4844,169 +4678,6 @@
 </file>
 
 <file path=ppt/slides/slide15.xml><?xml version="1.0" encoding="utf-8"?>
-<p:sld xmlns:a="http://schemas.openxmlformats.org/drawingml/2006/main" xmlns:p="http://schemas.openxmlformats.org/presentationml/2006/main" xmlns:r="http://schemas.openxmlformats.org/officeDocument/2006/relationships">
-  <p:cSld>
-    <p:bg>
-      <p:bgPr>
-        <a:solidFill>
-          <a:srgbClr val="FBF7EF"/>
-        </a:solidFill>
-        <a:effectLst/>
-      </p:bgPr>
-    </p:bg>
-    <p:spTree>
-      <p:nvGrpSpPr>
-        <p:cNvPr id="1" name=""/>
-        <p:cNvGrpSpPr/>
-        <p:nvPr/>
-      </p:nvGrpSpPr>
-      <p:grpSpPr/>
-      <p:sp>
-        <p:nvSpPr>
-          <p:cNvPr id="2" name="TextBox 1"/>
-          <p:cNvSpPr txBox="1"/>
-          <p:nvPr/>
-        </p:nvSpPr>
-        <p:spPr>
-          <a:xfrm>
-            <a:off x="640000" y="380000"/>
-            <a:ext cx="10912000" cy="420000"/>
-          </a:xfrm>
-          <a:prstGeom prst="rect">
-            <a:avLst/>
-          </a:prstGeom>
-          <a:noFill/>
-        </p:spPr>
-        <p:txBody>
-          <a:bodyPr wrap="square">
-            <a:spAutoFit/>
-          </a:bodyPr>
-          <a:lstStyle/>
-          <a:p>
-            <a:pPr>
-              <a:spcAft>
-                <a:spcPts val="630"/>
-              </a:spcAft>
-            </a:pPr>
-            <a:r>
-              <a:rPr sz="1400" b="1">
-                <a:solidFill>
-                  <a:srgbClr val="E8793A"/>
-                </a:solidFill>
-                <a:latin typeface="Nunito Sans"/>
-              </a:rPr>
-              <a:t>LO DE HOY EN TRES LÍNEAS</a:t>
-            </a:r>
-          </a:p>
-        </p:txBody>
-      </p:sp>
-      <p:sp>
-        <p:nvSpPr>
-          <p:cNvPr id="3" name="TextBox 2"/>
-          <p:cNvSpPr txBox="1"/>
-          <p:nvPr/>
-        </p:nvSpPr>
-        <p:spPr>
-          <a:xfrm>
-            <a:off x="640000" y="1300000"/>
-            <a:ext cx="10912000" cy="4800000"/>
-          </a:xfrm>
-          <a:prstGeom prst="rect">
-            <a:avLst/>
-          </a:prstGeom>
-          <a:noFill/>
-        </p:spPr>
-        <p:txBody>
-          <a:bodyPr wrap="square">
-            <a:spAutoFit/>
-          </a:bodyPr>
-          <a:lstStyle/>
-          <a:p>
-            <a:pPr>
-              <a:spcAft>
-                <a:spcPts val="1350"/>
-              </a:spcAft>
-            </a:pPr>
-            <a:r>
-              <a:rPr sz="3000" b="1">
-                <a:solidFill>
-                  <a:srgbClr val="E8793A"/>
-                </a:solidFill>
-                <a:latin typeface="Nunito Sans"/>
-              </a:rPr>
-              <a:t>1. </a:t>
-            </a:r>
-            <a:r>
-              <a:rPr sz="3000" b="0">
-                <a:solidFill>
-                  <a:srgbClr val="1F2A44"/>
-                </a:solidFill>
-                <a:latin typeface="Nunito Sans"/>
-              </a:rPr>
-              <a:t>Un sesgo cognitivo es un error del pensamiento que se repite de forma predecible.</a:t>
-            </a:r>
-          </a:p>
-          <a:p>
-            <a:pPr>
-              <a:spcAft>
-                <a:spcPts val="1350"/>
-              </a:spcAft>
-            </a:pPr>
-            <a:r>
-              <a:rPr sz="3000" b="1">
-                <a:solidFill>
-                  <a:srgbClr val="E8793A"/>
-                </a:solidFill>
-                <a:latin typeface="Nunito Sans"/>
-              </a:rPr>
-              <a:t>2. </a:t>
-            </a:r>
-            <a:r>
-              <a:rPr sz="3000" b="0">
-                <a:solidFill>
-                  <a:srgbClr val="1F2A44"/>
-                </a:solidFill>
-                <a:latin typeface="Nunito Sans"/>
-              </a:rPr>
-              <a:t>Viene de atajos mentales que casi siempre nos ayudan: decidir rápido no es un error.</a:t>
-            </a:r>
-          </a:p>
-          <a:p>
-            <a:pPr>
-              <a:spcAft>
-                <a:spcPts val="1350"/>
-              </a:spcAft>
-            </a:pPr>
-            <a:r>
-              <a:rPr sz="3000" b="1">
-                <a:solidFill>
-                  <a:srgbClr val="E8793A"/>
-                </a:solidFill>
-                <a:latin typeface="Nunito Sans"/>
-              </a:rPr>
-              <a:t>3. </a:t>
-            </a:r>
-            <a:r>
-              <a:rPr sz="3000" b="0">
-                <a:solidFill>
-                  <a:srgbClr val="1F2A44"/>
-                </a:solidFill>
-                <a:latin typeface="Nunito Sans"/>
-              </a:rPr>
-              <a:t>Pensar despacio y comprobar ayuda a corregir los sesgos.</a:t>
-            </a:r>
-          </a:p>
-        </p:txBody>
-      </p:sp>
-    </p:spTree>
-  </p:cSld>
-  <p:clrMapOvr>
-    <a:masterClrMapping/>
-  </p:clrMapOvr>
-</p:sld>
-</file>
-
-<file path=ppt/slides/slide16.xml><?xml version="1.0" encoding="utf-8"?>
 <p:sld xmlns:a="http://schemas.openxmlformats.org/drawingml/2006/main" xmlns:p="http://schemas.openxmlformats.org/presentationml/2006/main" xmlns:r="http://schemas.openxmlformats.org/officeDocument/2006/relationships">
   <p:cSld>
     <p:bg>
@@ -5058,149 +4729,6 @@
                 </a:solidFill>
                 <a:latin typeface="Nunito Sans"/>
               </a:rPr>
-              <a:t>VÍDEO</a:t>
-            </a:r>
-          </a:p>
-        </p:txBody>
-      </p:sp>
-      <p:sp>
-        <p:nvSpPr>
-          <p:cNvPr id="3" name="TextBox 2"/>
-          <p:cNvSpPr txBox="1"/>
-          <p:nvPr/>
-        </p:nvSpPr>
-        <p:spPr>
-          <a:xfrm>
-            <a:off x="640000" y="760000"/>
-            <a:ext cx="10912000" cy="800000"/>
-          </a:xfrm>
-          <a:prstGeom prst="rect">
-            <a:avLst/>
-          </a:prstGeom>
-          <a:noFill/>
-        </p:spPr>
-        <p:txBody>
-          <a:bodyPr wrap="square">
-            <a:spAutoFit/>
-          </a:bodyPr>
-          <a:lstStyle/>
-          <a:p>
-            <a:pPr>
-              <a:spcAft>
-                <a:spcPts val="1620"/>
-              </a:spcAft>
-            </a:pPr>
-            <a:r>
-              <a:rPr sz="3600" b="1">
-                <a:solidFill>
-                  <a:srgbClr val="FBF7EF"/>
-                </a:solidFill>
-                <a:latin typeface="Fredoka"/>
-              </a:rPr>
-              <a:t>Qué son los sesgos cognitivos</a:t>
-            </a:r>
-          </a:p>
-        </p:txBody>
-      </p:sp>
-      <p:sp>
-        <p:nvSpPr>
-          <p:cNvPr id="4" name="TextBox 3"/>
-          <p:cNvSpPr txBox="1"/>
-          <p:nvPr/>
-        </p:nvSpPr>
-        <p:spPr>
-          <a:xfrm>
-            <a:off x="640000" y="2200000"/>
-            <a:ext cx="10912000" cy="2000000"/>
-          </a:xfrm>
-          <a:prstGeom prst="rect">
-            <a:avLst/>
-          </a:prstGeom>
-          <a:noFill/>
-        </p:spPr>
-        <p:txBody>
-          <a:bodyPr wrap="square">
-            <a:spAutoFit/>
-          </a:bodyPr>
-          <a:lstStyle/>
-          <a:p>
-            <a:pPr>
-              <a:spcAft>
-                <a:spcPts val="1080"/>
-              </a:spcAft>
-            </a:pPr>
-            <a:r>
-              <a:rPr sz="2400" b="0">
-                <a:solidFill>
-                  <a:srgbClr val="C9D3E6"/>
-                </a:solidFill>
-                <a:latin typeface="Nunito Sans"/>
-              </a:rPr>
-              <a:t>Ver otros ejemplos de atajos mentales que fallan.</a:t>
-            </a:r>
-          </a:p>
-        </p:txBody>
-      </p:sp>
-    </p:spTree>
-  </p:cSld>
-  <p:clrMapOvr>
-    <a:masterClrMapping/>
-  </p:clrMapOvr>
-</p:sld>
-</file>
-
-<file path=ppt/slides/slide17.xml><?xml version="1.0" encoding="utf-8"?>
-<p:sld xmlns:a="http://schemas.openxmlformats.org/drawingml/2006/main" xmlns:p="http://schemas.openxmlformats.org/presentationml/2006/main" xmlns:r="http://schemas.openxmlformats.org/officeDocument/2006/relationships">
-  <p:cSld>
-    <p:bg>
-      <p:bgPr>
-        <a:solidFill>
-          <a:srgbClr val="1F2A44"/>
-        </a:solidFill>
-        <a:effectLst/>
-      </p:bgPr>
-    </p:bg>
-    <p:spTree>
-      <p:nvGrpSpPr>
-        <p:cNvPr id="1" name=""/>
-        <p:cNvGrpSpPr/>
-        <p:nvPr/>
-      </p:nvGrpSpPr>
-      <p:grpSpPr/>
-      <p:sp>
-        <p:nvSpPr>
-          <p:cNvPr id="2" name="TextBox 1"/>
-          <p:cNvSpPr txBox="1"/>
-          <p:nvPr/>
-        </p:nvSpPr>
-        <p:spPr>
-          <a:xfrm>
-            <a:off x="640000" y="380000"/>
-            <a:ext cx="10912000" cy="420000"/>
-          </a:xfrm>
-          <a:prstGeom prst="rect">
-            <a:avLst/>
-          </a:prstGeom>
-          <a:noFill/>
-        </p:spPr>
-        <p:txBody>
-          <a:bodyPr wrap="square">
-            <a:spAutoFit/>
-          </a:bodyPr>
-          <a:lstStyle/>
-          <a:p>
-            <a:pPr>
-              <a:spcAft>
-                <a:spcPts val="630"/>
-              </a:spcAft>
-            </a:pPr>
-            <a:r>
-              <a:rPr sz="1400" b="1">
-                <a:solidFill>
-                  <a:srgbClr val="F4B183"/>
-                </a:solidFill>
-                <a:latin typeface="Nunito Sans"/>
-              </a:rPr>
               <a:t>AHORA, LA HOJA DEL DÍA</a:t>
             </a:r>
           </a:p>
@@ -5642,7 +5170,7 @@
                 </a:solidFill>
                 <a:latin typeface="Nunito Sans"/>
               </a:rPr>
-              <a:t>1.ª pasada: sin apuntes, con bolígrafo. 2.ª pasada: con los apuntes, en otro color. Marca «seguro» o «dudo» en cada respuesta.</a:t>
+              <a:t>Sin apuntes. Junto a cada respuesta, marca «seguro» o «dudo».</a:t>
             </a:r>
           </a:p>
         </p:txBody>
@@ -5794,7 +5322,7 @@
                 </a:solidFill>
                 <a:latin typeface="Nunito Sans"/>
               </a:rPr>
-              <a:t>En un gráfico de barras, un eje que no empieza en 0 ______ las diferencias.  (sesión 42)</a:t>
+              <a:t>Muchos dilemas tienen más ______ que las dos primeras.  (sesión 42)</a:t>
             </a:r>
           </a:p>
           <a:p>
@@ -5819,7 +5347,7 @@
                 </a:solidFill>
                 <a:latin typeface="Nunito Sans"/>
               </a:rPr>
-              <a:t>Una media sola, sin ver los datos, no es ______.  (sesión 42)</a:t>
+              <a:t>Si una razón solo vale cuando me conviene, es una ______.  (sesión 42)</a:t>
             </a:r>
           </a:p>
           <a:p>
@@ -5844,7 +5372,7 @@
                 </a:solidFill>
                 <a:latin typeface="Nunito Sans"/>
               </a:rPr>
-              <a:t>La fuente ______ es quien lo vio, lo midió o lo decidió.  (sesión 31)</a:t>
+              <a:t>Saber es creer algo que es verdad y tener buenas ______.  (sesión 31)</a:t>
             </a:r>
           </a:p>
         </p:txBody>
@@ -5996,7 +5524,7 @@
                 </a:solidFill>
                 <a:latin typeface="Nunito Sans"/>
               </a:rPr>
-              <a:t>En un gráfico de barras, un eje que no empieza en 0 </a:t>
+              <a:t>Muchos dilemas tienen más </a:t>
             </a:r>
             <a:r>
               <a:rPr sz="2600" b="1">
@@ -6005,7 +5533,7 @@
                 </a:solidFill>
                 <a:latin typeface="Nunito Sans"/>
               </a:rPr>
-              <a:t>exagera</a:t>
+              <a:t>salidas</a:t>
             </a:r>
             <a:r>
               <a:rPr sz="2600" b="0">
@@ -6014,7 +5542,7 @@
                 </a:solidFill>
                 <a:latin typeface="Nunito Sans"/>
               </a:rPr>
-              <a:t> las diferencias.  (sesión 42)</a:t>
+              <a:t> que las dos primeras.  (sesión 42)</a:t>
             </a:r>
           </a:p>
           <a:p>
@@ -6039,7 +5567,7 @@
                 </a:solidFill>
                 <a:latin typeface="Nunito Sans"/>
               </a:rPr>
-              <a:t>Una media sola, sin ver los datos, no es </a:t>
+              <a:t>Si una razón solo vale cuando me conviene, es una </a:t>
             </a:r>
             <a:r>
               <a:rPr sz="2600" b="1">
@@ -6048,7 +5576,7 @@
                 </a:solidFill>
                 <a:latin typeface="Nunito Sans"/>
               </a:rPr>
-              <a:t>suficiente</a:t>
+              <a:t>excusa</a:t>
             </a:r>
             <a:r>
               <a:rPr sz="2600" b="0">
@@ -6082,7 +5610,7 @@
                 </a:solidFill>
                 <a:latin typeface="Nunito Sans"/>
               </a:rPr>
-              <a:t>La fuente </a:t>
+              <a:t>Saber es creer algo que es verdad y tener buenas </a:t>
             </a:r>
             <a:r>
               <a:rPr sz="2600" b="1">
@@ -6091,7 +5619,7 @@
                 </a:solidFill>
                 <a:latin typeface="Nunito Sans"/>
               </a:rPr>
-              <a:t>original</a:t>
+              <a:t>razones</a:t>
             </a:r>
             <a:r>
               <a:rPr sz="2600" b="0">
@@ -6100,7 +5628,7 @@
                 </a:solidFill>
                 <a:latin typeface="Nunito Sans"/>
               </a:rPr>
-              <a:t> es quien lo vio, lo midió o lo decidió.  (sesión 31)</a:t>
+              <a:t>.  (sesión 31)</a:t>
             </a:r>
           </a:p>
         </p:txBody>
@@ -6247,7 +5775,7 @@
                 </a:solidFill>
                 <a:latin typeface="Nunito Sans"/>
               </a:rPr>
-              <a:t>Un bate y una pelota cuestan 1,10 € en total. El bate cuesta 1 € más que la pelota.</a:t>
+              <a:t>En esta unidad has visto que sentir, chocar con otros y dudar sobre qué está bien es normal. Lo importante es qué hacemos con ello.</a:t>
             </a:r>
           </a:p>
         </p:txBody>
@@ -6286,7 +5814,7 @@
                 </a:solidFill>
                 <a:latin typeface="Nunito Sans"/>
               </a:rPr>
-              <a:t>¿Cuánto cuesta la pelota? Contesta rápido, en tu cabeza.</a:t>
+              <a:t>¿Qué idea de la unidad te ha servido ya fuera de clase?</a:t>
             </a:r>
           </a:p>
         </p:txBody>
@@ -6390,7 +5918,7 @@
                 </a:solidFill>
                 <a:latin typeface="Fredoka"/>
               </a:rPr>
-              <a:t>Atajos que fallan</a:t>
+              <a:t>Repaso de la unidad</a:t>
             </a:r>
           </a:p>
         </p:txBody>
@@ -6455,7 +5983,7 @@
                 </a:solidFill>
                 <a:latin typeface="Nunito Sans"/>
               </a:rPr>
-              <a:t>BLOQUE 1 · ATAJOS QUE FALLAN</a:t>
+              <a:t>BLOQUE 1 · REPASO DE LA UNIDAD</a:t>
             </a:r>
           </a:p>
         </p:txBody>
@@ -6494,7 +6022,7 @@
                 </a:solidFill>
                 <a:latin typeface="Fredoka"/>
               </a:rPr>
-              <a:t>Sesgo cognitivo</a:t>
+              <a:t>Sesión 38 · Las emociones informan, no mandan</a:t>
             </a:r>
           </a:p>
         </p:txBody>
@@ -6508,13 +6036,13 @@
         <p:spPr>
           <a:xfrm>
             <a:off x="640000" y="1650000"/>
-            <a:ext cx="10912000" cy="1150000"/>
+            <a:ext cx="5306000" cy="4400000"/>
           </a:xfrm>
           <a:prstGeom prst="rect">
             <a:avLst/>
           </a:prstGeom>
           <a:solidFill>
-            <a:srgbClr val="EAF0F7"/>
+            <a:srgbClr val="FBE3D2"/>
           </a:solidFill>
           <a:ln>
             <a:noFill/>
@@ -6550,8 +6078,8 @@
         </p:nvSpPr>
         <p:spPr>
           <a:xfrm>
-            <a:off x="840000" y="1730000"/>
-            <a:ext cx="10512000" cy="1000000"/>
+            <a:off x="840000" y="1750000"/>
+            <a:ext cx="4906000" cy="600000"/>
           </a:xfrm>
           <a:prstGeom prst="rect">
             <a:avLst/>
@@ -6559,7 +6087,7 @@
           <a:noFill/>
         </p:spPr>
         <p:txBody>
-          <a:bodyPr wrap="square" anchor="ctr">
+          <a:bodyPr wrap="square">
             <a:spAutoFit/>
           </a:bodyPr>
           <a:lstStyle/>
@@ -6572,29 +6100,11 @@
             <a:r>
               <a:rPr sz="2800" b="1">
                 <a:solidFill>
-                  <a:srgbClr val="1F2A44"/>
-                </a:solidFill>
-                <a:latin typeface="Nunito Sans"/>
-              </a:rPr>
-              <a:t>Un sesgo cognitivo es un error del pensamiento que se </a:t>
-            </a:r>
-            <a:r>
-              <a:rPr sz="2800" b="1">
-                <a:solidFill>
-                  <a:srgbClr val="1F2A44"/>
-                </a:solidFill>
-                <a:latin typeface="Nunito Sans"/>
-              </a:rPr>
-              <a:t>repite</a:t>
-            </a:r>
-            <a:r>
-              <a:rPr sz="2800" b="1">
-                <a:solidFill>
-                  <a:srgbClr val="1F2A44"/>
-                </a:solidFill>
-                <a:latin typeface="Nunito Sans"/>
-              </a:rPr>
-              <a:t> de forma predecible: siempre hacia el mismo lado.</a:t>
+                  <a:srgbClr val="C2531C"/>
+                </a:solidFill>
+                <a:latin typeface="Nunito Sans"/>
+              </a:rPr>
+              <a:t>No es así</a:t>
             </a:r>
           </a:p>
         </p:txBody>
@@ -6607,8 +6117,124 @@
         </p:nvSpPr>
         <p:spPr>
           <a:xfrm>
-            <a:off x="640000" y="3000000"/>
-            <a:ext cx="10912000" cy="3458000"/>
+            <a:off x="840000" y="2400000"/>
+            <a:ext cx="4906000" cy="3500000"/>
+          </a:xfrm>
+          <a:prstGeom prst="rect">
+            <a:avLst/>
+          </a:prstGeom>
+          <a:noFill/>
+        </p:spPr>
+        <p:txBody>
+          <a:bodyPr wrap="square">
+            <a:spAutoFit/>
+          </a:bodyPr>
+          <a:lstStyle/>
+          <a:p>
+            <a:pPr>
+              <a:spcAft>
+                <a:spcPts val="1170"/>
+              </a:spcAft>
+            </a:pPr>
+            <a:r>
+              <a:rPr sz="2600" b="1">
+                <a:solidFill>
+                  <a:srgbClr val="E8793A"/>
+                </a:solidFill>
+                <a:latin typeface="Nunito Sans"/>
+              </a:rPr>
+              <a:t>• </a:t>
+            </a:r>
+            <a:r>
+              <a:rPr sz="2600" b="0">
+                <a:solidFill>
+                  <a:srgbClr val="1F2A44"/>
+                </a:solidFill>
+                <a:latin typeface="Nunito Sans"/>
+              </a:rPr>
+              <a:t>«Hay emociones buenas y malas»</a:t>
+            </a:r>
+          </a:p>
+          <a:p>
+            <a:pPr>
+              <a:spcAft>
+                <a:spcPts val="1170"/>
+              </a:spcAft>
+            </a:pPr>
+            <a:r>
+              <a:rPr sz="2600" b="1">
+                <a:solidFill>
+                  <a:srgbClr val="E8793A"/>
+                </a:solidFill>
+                <a:latin typeface="Nunito Sans"/>
+              </a:rPr>
+              <a:t>• </a:t>
+            </a:r>
+            <a:r>
+              <a:rPr sz="2600" b="0">
+                <a:solidFill>
+                  <a:srgbClr val="1F2A44"/>
+                </a:solidFill>
+                <a:latin typeface="Nunito Sans"/>
+              </a:rPr>
+              <a:t>«Si lo siento, tengo que hacerlo»</a:t>
+            </a:r>
+          </a:p>
+        </p:txBody>
+      </p:sp>
+      <p:sp>
+        <p:nvSpPr>
+          <p:cNvPr id="7" name="Rectangle 6"/>
+          <p:cNvSpPr/>
+          <p:nvPr/>
+        </p:nvSpPr>
+        <p:spPr>
+          <a:xfrm>
+            <a:off x="6246000" y="1650000"/>
+            <a:ext cx="5306000" cy="4400000"/>
+          </a:xfrm>
+          <a:prstGeom prst="rect">
+            <a:avLst/>
+          </a:prstGeom>
+          <a:solidFill>
+            <a:srgbClr val="EAF0F7"/>
+          </a:solidFill>
+          <a:ln>
+            <a:noFill/>
+          </a:ln>
+        </p:spPr>
+        <p:style>
+          <a:lnRef idx="1">
+            <a:schemeClr val="accent1"/>
+          </a:lnRef>
+          <a:fillRef idx="3">
+            <a:schemeClr val="accent1"/>
+          </a:fillRef>
+          <a:effectRef idx="2">
+            <a:schemeClr val="accent1"/>
+          </a:effectRef>
+          <a:fontRef idx="minor">
+            <a:schemeClr val="lt1"/>
+          </a:fontRef>
+        </p:style>
+        <p:txBody>
+          <a:bodyPr rtlCol="0" anchor="ctr"/>
+          <a:lstStyle/>
+          <a:p>
+            <a:pPr algn="ctr"/>
+          </a:p>
+        </p:txBody>
+      </p:sp>
+      <p:sp>
+        <p:nvSpPr>
+          <p:cNvPr id="8" name="TextBox 7"/>
+          <p:cNvSpPr txBox="1"/>
+          <p:nvPr/>
+        </p:nvSpPr>
+        <p:spPr>
+          <a:xfrm>
+            <a:off x="6446000" y="1750000"/>
+            <a:ext cx="4906000" cy="600000"/>
           </a:xfrm>
           <a:prstGeom prst="rect">
             <a:avLst/>
@@ -6629,39 +6255,44 @@
             <a:r>
               <a:rPr sz="2800" b="1">
                 <a:solidFill>
-                  <a:srgbClr val="E8793A"/>
-                </a:solidFill>
-                <a:latin typeface="Nunito Sans"/>
-              </a:rPr>
-              <a:t>• </a:t>
-            </a:r>
-            <a:r>
-              <a:rPr sz="2800" b="1">
-                <a:solidFill>
-                  <a:srgbClr val="1F2A44"/>
-                </a:solidFill>
-                <a:latin typeface="Nunito Sans"/>
-              </a:rPr>
-              <a:t>Cognitivo:</a:t>
-            </a:r>
-            <a:r>
-              <a:rPr sz="2800" b="0">
-                <a:solidFill>
-                  <a:srgbClr val="1F2A44"/>
-                </a:solidFill>
-                <a:latin typeface="Nunito Sans"/>
-              </a:rPr>
-              <a:t> que tiene que ver con pensar y conocer</a:t>
-            </a:r>
-          </a:p>
+                  <a:srgbClr val="2F6FB5"/>
+                </a:solidFill>
+                <a:latin typeface="Nunito Sans"/>
+              </a:rPr>
+              <a:t>Así sí</a:t>
+            </a:r>
+          </a:p>
+        </p:txBody>
+      </p:sp>
+      <p:sp>
+        <p:nvSpPr>
+          <p:cNvPr id="9" name="TextBox 8"/>
+          <p:cNvSpPr txBox="1"/>
+          <p:nvPr/>
+        </p:nvSpPr>
+        <p:spPr>
+          <a:xfrm>
+            <a:off x="6446000" y="2400000"/>
+            <a:ext cx="4906000" cy="3500000"/>
+          </a:xfrm>
+          <a:prstGeom prst="rect">
+            <a:avLst/>
+          </a:prstGeom>
+          <a:noFill/>
+        </p:spPr>
+        <p:txBody>
+          <a:bodyPr wrap="square">
+            <a:spAutoFit/>
+          </a:bodyPr>
+          <a:lstStyle/>
           <a:p>
             <a:pPr>
               <a:spcAft>
-                <a:spcPts val="1260"/>
+                <a:spcPts val="1170"/>
               </a:spcAft>
             </a:pPr>
             <a:r>
-              <a:rPr sz="2800" b="1">
+              <a:rPr sz="2600" b="1">
                 <a:solidFill>
                   <a:srgbClr val="E8793A"/>
                 </a:solidFill>
@@ -6670,32 +6301,32 @@
               <a:t>• </a:t>
             </a:r>
             <a:r>
-              <a:rPr sz="2800" b="1">
+              <a:rPr sz="2600" b="0">
                 <a:solidFill>
                   <a:srgbClr val="1F2A44"/>
                 </a:solidFill>
                 <a:latin typeface="Nunito Sans"/>
               </a:rPr>
-              <a:t>Sesgo:</a:t>
-            </a:r>
-            <a:r>
-              <a:rPr sz="2800" b="0">
+              <a:t>Son agradables o desagradables, e </a:t>
+            </a:r>
+            <a:r>
+              <a:rPr sz="2600" b="1">
                 <a:solidFill>
                   <a:srgbClr val="1F2A44"/>
                 </a:solidFill>
                 <a:latin typeface="Nunito Sans"/>
               </a:rPr>
-              <a:t> inclinación hacia un lado (como la muestra sesgada)</a:t>
+              <a:t>informan</a:t>
             </a:r>
           </a:p>
           <a:p>
             <a:pPr>
               <a:spcAft>
-                <a:spcPts val="1260"/>
+                <a:spcPts val="1170"/>
               </a:spcAft>
             </a:pPr>
             <a:r>
-              <a:rPr sz="2800" b="1">
+              <a:rPr sz="2600" b="1">
                 <a:solidFill>
                   <a:srgbClr val="E8793A"/>
                 </a:solidFill>
@@ -6704,47 +6335,31 @@
               <a:t>• </a:t>
             </a:r>
             <a:r>
-              <a:rPr sz="2800" b="1">
+              <a:rPr sz="2600" b="0">
                 <a:solidFill>
                   <a:srgbClr val="1F2A44"/>
                 </a:solidFill>
                 <a:latin typeface="Nunito Sans"/>
               </a:rPr>
-              <a:t>Atajo mental:</a:t>
-            </a:r>
-            <a:r>
-              <a:rPr sz="2800" b="0">
+              <a:t>En caliente: nombrar, </a:t>
+            </a:r>
+            <a:r>
+              <a:rPr sz="2600" b="1">
                 <a:solidFill>
                   <a:srgbClr val="1F2A44"/>
                 </a:solidFill>
                 <a:latin typeface="Nunito Sans"/>
               </a:rPr>
-              <a:t> una forma rápida de decidir sin pensar mucho</a:t>
-            </a:r>
-          </a:p>
-          <a:p>
-            <a:pPr>
-              <a:spcAft>
-                <a:spcPts val="1260"/>
-              </a:spcAft>
-            </a:pPr>
-            <a:r>
-              <a:rPr sz="2800" b="1">
-                <a:solidFill>
-                  <a:srgbClr val="E8793A"/>
-                </a:solidFill>
-                <a:latin typeface="Nunito Sans"/>
-              </a:rPr>
-              <a:t>• </a:t>
-            </a:r>
-            <a:r>
-              <a:rPr sz="2800" b="0">
+              <a:t>esperar</a:t>
+            </a:r>
+            <a:r>
+              <a:rPr sz="2600" b="0">
                 <a:solidFill>
                   <a:srgbClr val="1F2A44"/>
                 </a:solidFill>
                 <a:latin typeface="Nunito Sans"/>
               </a:rPr>
-              <a:t>Nos pasa a todos, también a los expertos</a:t>
+              <a:t> y preguntar</a:t>
             </a:r>
           </a:p>
         </p:txBody>
@@ -6809,7 +6424,7 @@
                 </a:solidFill>
                 <a:latin typeface="Nunito Sans"/>
               </a:rPr>
-              <a:t>BLOQUE 1 · ATAJOS QUE FALLAN</a:t>
+              <a:t>BLOQUE 1 · REPASO DE LA UNIDAD</a:t>
             </a:r>
           </a:p>
         </p:txBody>
@@ -6848,7 +6463,7 @@
                 </a:solidFill>
                 <a:latin typeface="Fredoka"/>
               </a:rPr>
-              <a:t>Falacia o sesgo: ¿dónde está el fallo?</a:t>
+              <a:t>Sesión 39 · El conflicto no es una pelea</a:t>
             </a:r>
           </a:p>
         </p:txBody>
@@ -6862,13 +6477,13 @@
         <p:spPr>
           <a:xfrm>
             <a:off x="640000" y="1650000"/>
-            <a:ext cx="5306000" cy="4400000"/>
+            <a:ext cx="10912000" cy="1150000"/>
           </a:xfrm>
           <a:prstGeom prst="rect">
             <a:avLst/>
           </a:prstGeom>
           <a:solidFill>
-            <a:srgbClr val="FBE3D2"/>
+            <a:srgbClr val="EAF0F7"/>
           </a:solidFill>
           <a:ln>
             <a:noFill/>
@@ -6904,8 +6519,8 @@
         </p:nvSpPr>
         <p:spPr>
           <a:xfrm>
-            <a:off x="840000" y="1750000"/>
-            <a:ext cx="4906000" cy="600000"/>
+            <a:off x="840000" y="1730000"/>
+            <a:ext cx="10512000" cy="1000000"/>
           </a:xfrm>
           <a:prstGeom prst="rect">
             <a:avLst/>
@@ -6913,7 +6528,7 @@
           <a:noFill/>
         </p:spPr>
         <p:txBody>
-          <a:bodyPr wrap="square">
+          <a:bodyPr wrap="square" anchor="ctr">
             <a:spAutoFit/>
           </a:bodyPr>
           <a:lstStyle/>
@@ -6926,11 +6541,29 @@
             <a:r>
               <a:rPr sz="2800" b="1">
                 <a:solidFill>
-                  <a:srgbClr val="C2531C"/>
-                </a:solidFill>
-                <a:latin typeface="Nunito Sans"/>
-              </a:rPr>
-              <a:t>Falacia: fuera</a:t>
+                  <a:srgbClr val="1F2A44"/>
+                </a:solidFill>
+                <a:latin typeface="Nunito Sans"/>
+              </a:rPr>
+              <a:t>Un </a:t>
+            </a:r>
+            <a:r>
+              <a:rPr sz="2800" b="1">
+                <a:solidFill>
+                  <a:srgbClr val="1F2A44"/>
+                </a:solidFill>
+                <a:latin typeface="Nunito Sans"/>
+              </a:rPr>
+              <a:t>conflicto</a:t>
+            </a:r>
+            <a:r>
+              <a:rPr sz="2800" b="1">
+                <a:solidFill>
+                  <a:srgbClr val="1F2A44"/>
+                </a:solidFill>
+                <a:latin typeface="Nunito Sans"/>
+              </a:rPr>
+              <a:t> es un choque de intereses o necesidades. Es normal; la pelea es una mala forma de afrontarlo.</a:t>
             </a:r>
           </a:p>
         </p:txBody>
@@ -6943,158 +6576,8 @@
         </p:nvSpPr>
         <p:spPr>
           <a:xfrm>
-            <a:off x="840000" y="2400000"/>
-            <a:ext cx="4906000" cy="3500000"/>
-          </a:xfrm>
-          <a:prstGeom prst="rect">
-            <a:avLst/>
-          </a:prstGeom>
-          <a:noFill/>
-        </p:spPr>
-        <p:txBody>
-          <a:bodyPr wrap="square">
-            <a:spAutoFit/>
-          </a:bodyPr>
-          <a:lstStyle/>
-          <a:p>
-            <a:pPr>
-              <a:spcAft>
-                <a:spcPts val="1170"/>
-              </a:spcAft>
-            </a:pPr>
-            <a:r>
-              <a:rPr sz="2600" b="1">
-                <a:solidFill>
-                  <a:srgbClr val="E8793A"/>
-                </a:solidFill>
-                <a:latin typeface="Nunito Sans"/>
-              </a:rPr>
-              <a:t>• </a:t>
-            </a:r>
-            <a:r>
-              <a:rPr sz="2600" b="0">
-                <a:solidFill>
-                  <a:srgbClr val="1F2A44"/>
-                </a:solidFill>
-                <a:latin typeface="Nunito Sans"/>
-              </a:rPr>
-              <a:t>El fallo está en el </a:t>
-            </a:r>
-            <a:r>
-              <a:rPr sz="2600" b="1">
-                <a:solidFill>
-                  <a:srgbClr val="1F2A44"/>
-                </a:solidFill>
-                <a:latin typeface="Nunito Sans"/>
-              </a:rPr>
-              <a:t>argumento</a:t>
-            </a:r>
-          </a:p>
-          <a:p>
-            <a:pPr>
-              <a:spcAft>
-                <a:spcPts val="1170"/>
-              </a:spcAft>
-            </a:pPr>
-            <a:r>
-              <a:rPr sz="2600" b="1">
-                <a:solidFill>
-                  <a:srgbClr val="E8793A"/>
-                </a:solidFill>
-                <a:latin typeface="Nunito Sans"/>
-              </a:rPr>
-              <a:t>• </a:t>
-            </a:r>
-            <a:r>
-              <a:rPr sz="2600" b="0">
-                <a:solidFill>
-                  <a:srgbClr val="1F2A44"/>
-                </a:solidFill>
-                <a:latin typeface="Nunito Sans"/>
-              </a:rPr>
-              <a:t>Se ve en lo que alguien dice o escribe</a:t>
-            </a:r>
-          </a:p>
-          <a:p>
-            <a:pPr>
-              <a:spcAft>
-                <a:spcPts val="1170"/>
-              </a:spcAft>
-            </a:pPr>
-            <a:r>
-              <a:rPr sz="2600" b="1">
-                <a:solidFill>
-                  <a:srgbClr val="E8793A"/>
-                </a:solidFill>
-                <a:latin typeface="Nunito Sans"/>
-              </a:rPr>
-              <a:t>• </a:t>
-            </a:r>
-            <a:r>
-              <a:rPr sz="2600" b="0">
-                <a:solidFill>
-                  <a:srgbClr val="1F2A44"/>
-                </a:solidFill>
-                <a:latin typeface="Nunito Sans"/>
-              </a:rPr>
-              <a:t>Ejemplo: atacar a la persona en vez de a su idea</a:t>
-            </a:r>
-          </a:p>
-        </p:txBody>
-      </p:sp>
-      <p:sp>
-        <p:nvSpPr>
-          <p:cNvPr id="7" name="Rectangle 6"/>
-          <p:cNvSpPr/>
-          <p:nvPr/>
-        </p:nvSpPr>
-        <p:spPr>
-          <a:xfrm>
-            <a:off x="6246000" y="1650000"/>
-            <a:ext cx="5306000" cy="4400000"/>
-          </a:xfrm>
-          <a:prstGeom prst="rect">
-            <a:avLst/>
-          </a:prstGeom>
-          <a:solidFill>
-            <a:srgbClr val="EAF0F7"/>
-          </a:solidFill>
-          <a:ln>
-            <a:noFill/>
-          </a:ln>
-        </p:spPr>
-        <p:style>
-          <a:lnRef idx="1">
-            <a:schemeClr val="accent1"/>
-          </a:lnRef>
-          <a:fillRef idx="3">
-            <a:schemeClr val="accent1"/>
-          </a:fillRef>
-          <a:effectRef idx="2">
-            <a:schemeClr val="accent1"/>
-          </a:effectRef>
-          <a:fontRef idx="minor">
-            <a:schemeClr val="lt1"/>
-          </a:fontRef>
-        </p:style>
-        <p:txBody>
-          <a:bodyPr rtlCol="0" anchor="ctr"/>
-          <a:lstStyle/>
-          <a:p>
-            <a:pPr algn="ctr"/>
-          </a:p>
-        </p:txBody>
-      </p:sp>
-      <p:sp>
-        <p:nvSpPr>
-          <p:cNvPr id="8" name="TextBox 7"/>
-          <p:cNvSpPr txBox="1"/>
-          <p:nvPr/>
-        </p:nvSpPr>
-        <p:spPr>
-          <a:xfrm>
-            <a:off x="6446000" y="1750000"/>
-            <a:ext cx="4906000" cy="600000"/>
+            <a:off x="640000" y="3000000"/>
+            <a:ext cx="10912000" cy="3458000"/>
           </a:xfrm>
           <a:prstGeom prst="rect">
             <a:avLst/>
@@ -7115,44 +6598,30 @@
             <a:r>
               <a:rPr sz="2800" b="1">
                 <a:solidFill>
-                  <a:srgbClr val="2F6FB5"/>
-                </a:solidFill>
-                <a:latin typeface="Nunito Sans"/>
-              </a:rPr>
-              <a:t>Sesgo: dentro</a:t>
-            </a:r>
-          </a:p>
-        </p:txBody>
-      </p:sp>
-      <p:sp>
-        <p:nvSpPr>
-          <p:cNvPr id="9" name="TextBox 8"/>
-          <p:cNvSpPr txBox="1"/>
-          <p:nvPr/>
-        </p:nvSpPr>
-        <p:spPr>
-          <a:xfrm>
-            <a:off x="6446000" y="2400000"/>
-            <a:ext cx="4906000" cy="3500000"/>
-          </a:xfrm>
-          <a:prstGeom prst="rect">
-            <a:avLst/>
-          </a:prstGeom>
-          <a:noFill/>
-        </p:spPr>
-        <p:txBody>
-          <a:bodyPr wrap="square">
-            <a:spAutoFit/>
-          </a:bodyPr>
-          <a:lstStyle/>
+                  <a:srgbClr val="E8793A"/>
+                </a:solidFill>
+                <a:latin typeface="Nunito Sans"/>
+              </a:rPr>
+              <a:t>• </a:t>
+            </a:r>
+            <a:r>
+              <a:rPr sz="2800" b="0">
+                <a:solidFill>
+                  <a:srgbClr val="1F2A44"/>
+                </a:solidFill>
+                <a:latin typeface="Nunito Sans"/>
+              </a:rPr>
+              <a:t>Cinco actitudes: evitar, ceder, competir, pactar y colaborar</a:t>
+            </a:r>
+          </a:p>
           <a:p>
             <a:pPr>
               <a:spcAft>
-                <a:spcPts val="1170"/>
+                <a:spcPts val="1260"/>
               </a:spcAft>
             </a:pPr>
             <a:r>
-              <a:rPr sz="2600" b="1">
+              <a:rPr sz="2800" b="1">
                 <a:solidFill>
                   <a:srgbClr val="E8793A"/>
                 </a:solidFill>
@@ -7161,72 +6630,49 @@
               <a:t>• </a:t>
             </a:r>
             <a:r>
-              <a:rPr sz="2600" b="0">
+              <a:rPr sz="2800" b="0">
                 <a:solidFill>
                   <a:srgbClr val="1F2A44"/>
                 </a:solidFill>
                 <a:latin typeface="Nunito Sans"/>
               </a:rPr>
-              <a:t>El atajo que falla está en mi </a:t>
-            </a:r>
-            <a:r>
-              <a:rPr sz="2600" b="1">
+              <a:t>La </a:t>
+            </a:r>
+            <a:r>
+              <a:rPr sz="2800" b="1">
                 <a:solidFill>
                   <a:srgbClr val="1F2A44"/>
                 </a:solidFill>
                 <a:latin typeface="Nunito Sans"/>
               </a:rPr>
-              <a:t>cabeza</a:t>
-            </a:r>
-          </a:p>
-          <a:p>
-            <a:pPr>
-              <a:spcAft>
-                <a:spcPts val="1170"/>
-              </a:spcAft>
-            </a:pPr>
-            <a:r>
-              <a:rPr sz="2600" b="1">
-                <a:solidFill>
-                  <a:srgbClr val="E8793A"/>
-                </a:solidFill>
-                <a:latin typeface="Nunito Sans"/>
-              </a:rPr>
-              <a:t>• </a:t>
-            </a:r>
-            <a:r>
-              <a:rPr sz="2600" b="0">
+              <a:t>postura</a:t>
+            </a:r>
+            <a:r>
+              <a:rPr sz="2800" b="0">
                 <a:solidFill>
                   <a:srgbClr val="1F2A44"/>
                 </a:solidFill>
                 <a:latin typeface="Nunito Sans"/>
               </a:rPr>
-              <a:t>Me pasa aunque nadie me quiera engañar</a:t>
-            </a:r>
-          </a:p>
-          <a:p>
-            <a:pPr>
-              <a:spcAft>
-                <a:spcPts val="1170"/>
-              </a:spcAft>
-            </a:pPr>
-            <a:r>
-              <a:rPr sz="2600" b="1">
-                <a:solidFill>
-                  <a:srgbClr val="E8793A"/>
-                </a:solidFill>
-                <a:latin typeface="Nunito Sans"/>
-              </a:rPr>
-              <a:t>• </a:t>
-            </a:r>
-            <a:r>
-              <a:rPr sz="2600" b="0">
+              <a:t> es lo que pido; el </a:t>
+            </a:r>
+            <a:r>
+              <a:rPr sz="2800" b="1">
                 <a:solidFill>
                   <a:srgbClr val="1F2A44"/>
                 </a:solidFill>
                 <a:latin typeface="Nunito Sans"/>
               </a:rPr>
-              <a:t>Ejemplo: decir rápido que la pelota cuesta 10 céntimos</a:t>
+              <a:t>interés</a:t>
+            </a:r>
+            <a:r>
+              <a:rPr sz="2800" b="0">
+                <a:solidFill>
+                  <a:srgbClr val="1F2A44"/>
+                </a:solidFill>
+                <a:latin typeface="Nunito Sans"/>
+              </a:rPr>
+              <a:t>, lo que necesito</a:t>
             </a:r>
           </a:p>
         </p:txBody>
@@ -7291,7 +6737,7 @@
                 </a:solidFill>
                 <a:latin typeface="Nunito Sans"/>
               </a:rPr>
-              <a:t>BLOQUE 1 · ATAJOS QUE FALLAN</a:t>
+              <a:t>BLOQUE 1 · REPASO DE LA UNIDAD</a:t>
             </a:r>
           </a:p>
         </p:txBody>
@@ -7330,310 +6776,166 @@
                 </a:solidFill>
                 <a:latin typeface="Fredoka"/>
               </a:rPr>
-              <a:t>Dos formas de pensar, según Daniel Kahneman</a:t>
-            </a:r>
-          </a:p>
-        </p:txBody>
-      </p:sp>
-      <p:graphicFrame>
-        <p:nvGraphicFramePr>
-          <p:cNvPr id="4" name="Table 3"/>
-          <p:cNvGraphicFramePr>
-            <a:graphicFrameLocks noGrp="1"/>
-          </p:cNvGraphicFramePr>
+              <a:t>Sesión 40 · Conflictos en las redes</a:t>
+            </a:r>
+          </a:p>
+        </p:txBody>
+      </p:sp>
+      <p:sp>
+        <p:nvSpPr>
+          <p:cNvPr id="4" name="Rectangle 3"/>
+          <p:cNvSpPr/>
           <p:nvPr/>
-        </p:nvGraphicFramePr>
-        <p:xfrm>
-          <a:off x="640000" y="1700000"/>
-          <a:ext cx="10912000" cy="2400000"/>
-        </p:xfrm>
-        <a:graphic>
-          <a:graphicData uri="http://schemas.openxmlformats.org/drawingml/2006/table">
-            <a:tbl>
-              <a:tblPr firstRow="1" bandRow="1">
-                <a:tableStyleId>{5C22544A-7EE6-4342-B048-85BDC9FD1C3A}</a:tableStyleId>
-              </a:tblPr>
-              <a:tblGrid>
-                <a:gridCol w="3637333"/>
-                <a:gridCol w="3637333"/>
-                <a:gridCol w="3637334"/>
-              </a:tblGrid>
-              <a:tr h="600000">
-                <a:tc>
-                  <a:txBody>
-                    <a:bodyPr/>
-                    <a:lstStyle/>
-                    <a:p>
-                      <a:r>
-                        <a:rPr sz="2000" b="1">
-                          <a:solidFill>
-                            <a:srgbClr val="FBF7EF"/>
-                          </a:solidFill>
-                          <a:latin typeface="Fredoka"/>
-                        </a:rPr>
-                        <a:t>Aspecto</a:t>
-                      </a:r>
-                    </a:p>
-                  </a:txBody>
-                  <a:tcPr>
-                    <a:solidFill>
-                      <a:srgbClr val="1F2A44"/>
-                    </a:solidFill>
-                  </a:tcPr>
-                </a:tc>
-                <a:tc>
-                  <a:txBody>
-                    <a:bodyPr/>
-                    <a:lstStyle/>
-                    <a:p>
-                      <a:r>
-                        <a:rPr sz="2000" b="1">
-                          <a:solidFill>
-                            <a:srgbClr val="FBF7EF"/>
-                          </a:solidFill>
-                          <a:latin typeface="Fredoka"/>
-                        </a:rPr>
-                        <a:t>Pensar rápido</a:t>
-                      </a:r>
-                    </a:p>
-                  </a:txBody>
-                  <a:tcPr>
-                    <a:solidFill>
-                      <a:srgbClr val="1F2A44"/>
-                    </a:solidFill>
-                  </a:tcPr>
-                </a:tc>
-                <a:tc>
-                  <a:txBody>
-                    <a:bodyPr/>
-                    <a:lstStyle/>
-                    <a:p>
-                      <a:r>
-                        <a:rPr sz="2000" b="1">
-                          <a:solidFill>
-                            <a:srgbClr val="FBF7EF"/>
-                          </a:solidFill>
-                          <a:latin typeface="Fredoka"/>
-                        </a:rPr>
-                        <a:t>Pensar despacio</a:t>
-                      </a:r>
-                    </a:p>
-                  </a:txBody>
-                  <a:tcPr>
-                    <a:solidFill>
-                      <a:srgbClr val="1F2A44"/>
-                    </a:solidFill>
-                  </a:tcPr>
-                </a:tc>
-              </a:tr>
-              <a:tr h="600000">
-                <a:tc>
-                  <a:txBody>
-                    <a:bodyPr/>
-                    <a:lstStyle/>
-                    <a:p>
-                      <a:r>
-                        <a:rPr sz="2000" b="0">
-                          <a:solidFill>
-                            <a:srgbClr val="1F2A44"/>
-                          </a:solidFill>
-                          <a:latin typeface="Nunito Sans"/>
-                        </a:rPr>
-                        <a:t>Cómo es</a:t>
-                      </a:r>
-                    </a:p>
-                  </a:txBody>
-                  <a:tcPr>
-                    <a:solidFill>
-                      <a:srgbClr val="FFFFFF"/>
-                    </a:solidFill>
-                  </a:tcPr>
-                </a:tc>
-                <a:tc>
-                  <a:txBody>
-                    <a:bodyPr/>
-                    <a:lstStyle/>
-                    <a:p>
-                      <a:r>
-                        <a:rPr sz="2000" b="0">
-                          <a:solidFill>
-                            <a:srgbClr val="1F2A44"/>
-                          </a:solidFill>
-                          <a:latin typeface="Nunito Sans"/>
-                        </a:rPr>
-                        <a:t>Automático, sin esfuerzo</a:t>
-                      </a:r>
-                    </a:p>
-                  </a:txBody>
-                  <a:tcPr>
-                    <a:solidFill>
-                      <a:srgbClr val="FFFFFF"/>
-                    </a:solidFill>
-                  </a:tcPr>
-                </a:tc>
-                <a:tc>
-                  <a:txBody>
-                    <a:bodyPr/>
-                    <a:lstStyle/>
-                    <a:p>
-                      <a:r>
-                        <a:rPr sz="2000" b="0">
-                          <a:solidFill>
-                            <a:srgbClr val="1F2A44"/>
-                          </a:solidFill>
-                          <a:latin typeface="Nunito Sans"/>
-                        </a:rPr>
-                        <a:t>Lento, con esfuerzo</a:t>
-                      </a:r>
-                    </a:p>
-                  </a:txBody>
-                  <a:tcPr>
-                    <a:solidFill>
-                      <a:srgbClr val="FFFFFF"/>
-                    </a:solidFill>
-                  </a:tcPr>
-                </a:tc>
-              </a:tr>
-              <a:tr h="600000">
-                <a:tc>
-                  <a:txBody>
-                    <a:bodyPr/>
-                    <a:lstStyle/>
-                    <a:p>
-                      <a:r>
-                        <a:rPr sz="2000" b="0">
-                          <a:solidFill>
-                            <a:srgbClr val="1F2A44"/>
-                          </a:solidFill>
-                          <a:latin typeface="Nunito Sans"/>
-                        </a:rPr>
-                        <a:t>Ejemplo</a:t>
-                      </a:r>
-                    </a:p>
-                  </a:txBody>
-                  <a:tcPr>
-                    <a:solidFill>
-                      <a:srgbClr val="EAF0F7"/>
-                    </a:solidFill>
-                  </a:tcPr>
-                </a:tc>
-                <a:tc>
-                  <a:txBody>
-                    <a:bodyPr/>
-                    <a:lstStyle/>
-                    <a:p>
-                      <a:r>
-                        <a:rPr sz="2000" b="0">
-                          <a:solidFill>
-                            <a:srgbClr val="1F2A44"/>
-                          </a:solidFill>
-                          <a:latin typeface="Nunito Sans"/>
-                        </a:rPr>
-                        <a:t>Saber cuánto es 2 + 2</a:t>
-                      </a:r>
-                    </a:p>
-                  </a:txBody>
-                  <a:tcPr>
-                    <a:solidFill>
-                      <a:srgbClr val="EAF0F7"/>
-                    </a:solidFill>
-                  </a:tcPr>
-                </a:tc>
-                <a:tc>
-                  <a:txBody>
-                    <a:bodyPr/>
-                    <a:lstStyle/>
-                    <a:p>
-                      <a:r>
-                        <a:rPr sz="2000" b="0">
-                          <a:solidFill>
-                            <a:srgbClr val="1F2A44"/>
-                          </a:solidFill>
-                          <a:latin typeface="Nunito Sans"/>
-                        </a:rPr>
-                        <a:t>Calcular 17 × 24</a:t>
-                      </a:r>
-                    </a:p>
-                  </a:txBody>
-                  <a:tcPr>
-                    <a:solidFill>
-                      <a:srgbClr val="EAF0F7"/>
-                    </a:solidFill>
-                  </a:tcPr>
-                </a:tc>
-              </a:tr>
-              <a:tr h="600000">
-                <a:tc>
-                  <a:txBody>
-                    <a:bodyPr/>
-                    <a:lstStyle/>
-                    <a:p>
-                      <a:r>
-                        <a:rPr sz="2000" b="0">
-                          <a:solidFill>
-                            <a:srgbClr val="1F2A44"/>
-                          </a:solidFill>
-                          <a:latin typeface="Nunito Sans"/>
-                        </a:rPr>
-                        <a:t>Problema</a:t>
-                      </a:r>
-                    </a:p>
-                  </a:txBody>
-                  <a:tcPr>
-                    <a:solidFill>
-                      <a:srgbClr val="FFFFFF"/>
-                    </a:solidFill>
-                  </a:tcPr>
-                </a:tc>
-                <a:tc>
-                  <a:txBody>
-                    <a:bodyPr/>
-                    <a:lstStyle/>
-                    <a:p>
-                      <a:r>
-                        <a:rPr sz="2000" b="0">
-                          <a:solidFill>
-                            <a:srgbClr val="1F2A44"/>
-                          </a:solidFill>
-                          <a:latin typeface="Nunito Sans"/>
-                        </a:rPr>
-                        <a:t>Se equivoca en preguntas con trampa</a:t>
-                      </a:r>
-                    </a:p>
-                  </a:txBody>
-                  <a:tcPr>
-                    <a:solidFill>
-                      <a:srgbClr val="FFFFFF"/>
-                    </a:solidFill>
-                  </a:tcPr>
-                </a:tc>
-                <a:tc>
-                  <a:txBody>
-                    <a:bodyPr/>
-                    <a:lstStyle/>
-                    <a:p>
-                      <a:r>
-                        <a:rPr sz="2000" b="0">
-                          <a:solidFill>
-                            <a:srgbClr val="1F2A44"/>
-                          </a:solidFill>
-                          <a:latin typeface="Nunito Sans"/>
-                        </a:rPr>
-                        <a:t>Cansa: no lo usamos siempre</a:t>
-                      </a:r>
-                    </a:p>
-                  </a:txBody>
-                  <a:tcPr>
-                    <a:solidFill>
-                      <a:srgbClr val="FFFFFF"/>
-                    </a:solidFill>
-                  </a:tcPr>
-                </a:tc>
-              </a:tr>
-            </a:tbl>
-          </a:graphicData>
-        </a:graphic>
-      </p:graphicFrame>
+        </p:nvSpPr>
+        <p:spPr>
+          <a:xfrm>
+            <a:off x="640000" y="1650000"/>
+            <a:ext cx="10912000" cy="1150000"/>
+          </a:xfrm>
+          <a:prstGeom prst="rect">
+            <a:avLst/>
+          </a:prstGeom>
+          <a:solidFill>
+            <a:srgbClr val="EAF0F7"/>
+          </a:solidFill>
+          <a:ln>
+            <a:noFill/>
+          </a:ln>
+        </p:spPr>
+        <p:style>
+          <a:lnRef idx="1">
+            <a:schemeClr val="accent1"/>
+          </a:lnRef>
+          <a:fillRef idx="3">
+            <a:schemeClr val="accent1"/>
+          </a:fillRef>
+          <a:effectRef idx="2">
+            <a:schemeClr val="accent1"/>
+          </a:effectRef>
+          <a:fontRef idx="minor">
+            <a:schemeClr val="lt1"/>
+          </a:fontRef>
+        </p:style>
+        <p:txBody>
+          <a:bodyPr rtlCol="0" anchor="ctr"/>
+          <a:lstStyle/>
+          <a:p>
+            <a:pPr algn="ctr"/>
+          </a:p>
+        </p:txBody>
+      </p:sp>
+      <p:sp>
+        <p:nvSpPr>
+          <p:cNvPr id="5" name="TextBox 4"/>
+          <p:cNvSpPr txBox="1"/>
+          <p:nvPr/>
+        </p:nvSpPr>
+        <p:spPr>
+          <a:xfrm>
+            <a:off x="840000" y="1730000"/>
+            <a:ext cx="10512000" cy="1000000"/>
+          </a:xfrm>
+          <a:prstGeom prst="rect">
+            <a:avLst/>
+          </a:prstGeom>
+          <a:noFill/>
+        </p:spPr>
+        <p:txBody>
+          <a:bodyPr wrap="square" anchor="ctr">
+            <a:spAutoFit/>
+          </a:bodyPr>
+          <a:lstStyle/>
+          <a:p>
+            <a:pPr>
+              <a:spcAft>
+                <a:spcPts val="1260"/>
+              </a:spcAft>
+            </a:pPr>
+            <a:r>
+              <a:rPr sz="2800" b="1">
+                <a:solidFill>
+                  <a:srgbClr val="1F2A44"/>
+                </a:solidFill>
+                <a:latin typeface="Nunito Sans"/>
+              </a:rPr>
+              <a:t>En las redes los conflictos crecen: sin cara, con anonimato, todo queda guardado y lo ve mucha gente.</a:t>
+            </a:r>
+          </a:p>
+        </p:txBody>
+      </p:sp>
+      <p:sp>
+        <p:nvSpPr>
+          <p:cNvPr id="6" name="TextBox 5"/>
+          <p:cNvSpPr txBox="1"/>
+          <p:nvPr/>
+        </p:nvSpPr>
+        <p:spPr>
+          <a:xfrm>
+            <a:off x="640000" y="3000000"/>
+            <a:ext cx="10912000" cy="3458000"/>
+          </a:xfrm>
+          <a:prstGeom prst="rect">
+            <a:avLst/>
+          </a:prstGeom>
+          <a:noFill/>
+        </p:spPr>
+        <p:txBody>
+          <a:bodyPr wrap="square">
+            <a:spAutoFit/>
+          </a:bodyPr>
+          <a:lstStyle/>
+          <a:p>
+            <a:pPr>
+              <a:spcAft>
+                <a:spcPts val="1260"/>
+              </a:spcAft>
+            </a:pPr>
+            <a:r>
+              <a:rPr sz="2800" b="1">
+                <a:solidFill>
+                  <a:srgbClr val="E8793A"/>
+                </a:solidFill>
+                <a:latin typeface="Nunito Sans"/>
+              </a:rPr>
+              <a:t>• </a:t>
+            </a:r>
+            <a:r>
+              <a:rPr sz="2800" b="0">
+                <a:solidFill>
+                  <a:srgbClr val="1F2A44"/>
+                </a:solidFill>
+                <a:latin typeface="Nunito Sans"/>
+              </a:rPr>
+              <a:t>Ciberacoso: hacer daño a propósito y de forma repetida</a:t>
+            </a:r>
+          </a:p>
+          <a:p>
+            <a:pPr>
+              <a:spcAft>
+                <a:spcPts val="1260"/>
+              </a:spcAft>
+            </a:pPr>
+            <a:r>
+              <a:rPr sz="2800" b="1">
+                <a:solidFill>
+                  <a:srgbClr val="E8793A"/>
+                </a:solidFill>
+                <a:latin typeface="Nunito Sans"/>
+              </a:rPr>
+              <a:t>• </a:t>
+            </a:r>
+            <a:r>
+              <a:rPr sz="2800" b="0">
+                <a:solidFill>
+                  <a:srgbClr val="1F2A44"/>
+                </a:solidFill>
+                <a:latin typeface="Nunito Sans"/>
+              </a:rPr>
+              <a:t>Quien reenvía un mensaje dañino también es responsable</a:t>
+            </a:r>
+          </a:p>
+        </p:txBody>
+      </p:sp>
     </p:spTree>
   </p:cSld>
   <p:clrMapOvr>
@@ -7694,7 +6996,7 @@
                 </a:solidFill>
                 <a:latin typeface="Nunito Sans"/>
               </a:rPr>
-              <a:t>BLOQUE 1 · ATAJOS QUE FALLAN</a:t>
+              <a:t>BLOQUE 1 · REPASO DE LA UNIDAD</a:t>
             </a:r>
           </a:p>
         </p:txBody>
@@ -7733,7 +7035,7 @@
                 </a:solidFill>
                 <a:latin typeface="Fredoka"/>
               </a:rPr>
-              <a:t>¿Por qué tenemos atajos?</a:t>
+              <a:t>Sesiones 41 y 42 · Dilemas éticos</a:t>
             </a:r>
           </a:p>
         </p:txBody>
@@ -7746,8 +7048,65 @@
         </p:nvSpPr>
         <p:spPr>
           <a:xfrm>
-            <a:off x="640000" y="1650000"/>
-            <a:ext cx="10912000" cy="4808000"/>
+            <a:off x="840000" y="1730000"/>
+            <a:ext cx="10512000" cy="1000000"/>
+          </a:xfrm>
+          <a:prstGeom prst="rect">
+            <a:avLst/>
+          </a:prstGeom>
+          <a:noFill/>
+        </p:spPr>
+        <p:txBody>
+          <a:bodyPr wrap="square" anchor="ctr">
+            <a:spAutoFit/>
+          </a:bodyPr>
+          <a:lstStyle/>
+          <a:p>
+            <a:pPr>
+              <a:spcAft>
+                <a:spcPts val="1080"/>
+              </a:spcAft>
+            </a:pPr>
+            <a:r>
+              <a:rPr sz="2400" b="0">
+                <a:solidFill>
+                  <a:srgbClr val="1F2A44"/>
+                </a:solidFill>
+                <a:latin typeface="Nunito Sans"/>
+              </a:rPr>
+              <a:t>Un dilema tiene buenas razones para dos respuestas porque chocan dos </a:t>
+            </a:r>
+            <a:r>
+              <a:rPr sz="2400" b="1">
+                <a:solidFill>
+                  <a:srgbClr val="1F2A44"/>
+                </a:solidFill>
+                <a:latin typeface="Nunito Sans"/>
+              </a:rPr>
+              <a:t>valores</a:t>
+            </a:r>
+            <a:r>
+              <a:rPr sz="2400" b="0">
+                <a:solidFill>
+                  <a:srgbClr val="1F2A44"/>
+                </a:solidFill>
+                <a:latin typeface="Nunito Sans"/>
+              </a:rPr>
+              <a:t>.</a:t>
+            </a:r>
+          </a:p>
+        </p:txBody>
+      </p:sp>
+      <p:sp>
+        <p:nvSpPr>
+          <p:cNvPr id="5" name="TextBox 4"/>
+          <p:cNvSpPr txBox="1"/>
+          <p:nvPr/>
+        </p:nvSpPr>
+        <p:spPr>
+          <a:xfrm>
+            <a:off x="640000" y="3000000"/>
+            <a:ext cx="10912000" cy="3458000"/>
           </a:xfrm>
           <a:prstGeom prst="rect">
             <a:avLst/>
@@ -7781,7 +7140,7 @@
                 </a:solidFill>
                 <a:latin typeface="Nunito Sans"/>
               </a:rPr>
-              <a:t>Cada día tomamos muchísimas decisiones</a:t>
+              <a:t>¿Qué valores chocan?</a:t>
             </a:r>
           </a:p>
           <a:p>
@@ -7806,7 +7165,7 @@
                 </a:solidFill>
                 <a:latin typeface="Nunito Sans"/>
               </a:rPr>
-              <a:t>Pensarlo todo despacio sería agotador</a:t>
+              <a:t>¿Hay más salidas?</a:t>
             </a:r>
           </a:p>
           <a:p>
@@ -7831,7 +7190,7 @@
                 </a:solidFill>
                 <a:latin typeface="Nunito Sans"/>
               </a:rPr>
-              <a:t>Casi siempre los atajos aciertan: son útiles</a:t>
+              <a:t>¿Qué consecuencias tiene cada opción?</a:t>
             </a:r>
           </a:p>
           <a:p>
@@ -7856,25 +7215,7 @@
                 </a:solidFill>
                 <a:latin typeface="Nunito Sans"/>
               </a:rPr>
-              <a:t>Pero en ciertas situaciones fallan </a:t>
-            </a:r>
-            <a:r>
-              <a:rPr sz="2800" b="1">
-                <a:solidFill>
-                  <a:srgbClr val="1F2A44"/>
-                </a:solidFill>
-                <a:latin typeface="Nunito Sans"/>
-              </a:rPr>
-              <a:t>siempre hacia el mismo lado</a:t>
-            </a:r>
-            <a:r>
-              <a:rPr sz="2800" b="0">
-                <a:solidFill>
-                  <a:srgbClr val="1F2A44"/>
-                </a:solidFill>
-                <a:latin typeface="Nunito Sans"/>
-              </a:rPr>
-              <a:t>: eso es un sesgo</a:t>
+              <a:t>¿Aceptaría que todos hicieran lo mismo?</a:t>
             </a:r>
           </a:p>
         </p:txBody>
